--- a/docs/nabd/NABD_Problem_Empathy_BMC.pptx
+++ b/docs/nabd/NABD_Problem_Empathy_BMC.pptx
@@ -11,9 +11,10 @@
     <p:sldId id="259" r:id="rId5"/>
     <p:sldId id="260" r:id="rId6"/>
     <p:sldId id="261" r:id="rId7"/>
+    <p:sldId id="262" r:id="rId8"/>
   </p:sldIdLst>
   <p:notesMasterIdLst>
-    <p:notesMasterId r:id="rId8"/>
+    <p:notesMasterId r:id="rId9"/>
   </p:notesMasterIdLst>
   <p:sldSz cx="12192000" cy="6858000"/>
   <p:notesSz cx="6858000" cy="12192000"/>
@@ -971,6 +972,94 @@
             <a:fld id="{F7021451-1387-4CA6-816F-3879F97B5CBC}" type="slidenum">
               <a:rPr lang="en-US"/>
               <a:t>6</a:t>
+            </a:fld>
+            <a:endParaRPr lang="en-US"/>
+          </a:p>
+        </p:txBody>
+      </p:sp>
+    </p:spTree>
+    <p:extLst>
+      <p:ext uri="{BB962C8B-B14F-4D97-AF65-F5344CB8AC3E}">
+        <p14:creationId xmlns:p14="http://schemas.microsoft.com/office/powerpoint/2010/main" val="1024086991"/>
+      </p:ext>
+    </p:extLst>
+  </p:cSld>
+  <p:clrMapOvr>
+    <a:masterClrMapping/>
+  </p:clrMapOvr>
+</p:notes>
+</file>
+
+<file path=ppt/notesSlides/notesSlide7.xml><?xml version="1.0" encoding="utf-8"?>
+<p:notes xmlns:a="http://schemas.openxmlformats.org/drawingml/2006/main" xmlns:r="http://schemas.openxmlformats.org/officeDocument/2006/relationships" xmlns:p="http://schemas.openxmlformats.org/presentationml/2006/main">
+  <p:cSld>
+    <p:spTree>
+      <p:nvGrpSpPr>
+        <p:cNvPr id="1" name=""/>
+        <p:cNvGrpSpPr/>
+        <p:nvPr/>
+      </p:nvGrpSpPr>
+      <p:grpSpPr>
+        <a:xfrm>
+          <a:off x="0" y="0"/>
+          <a:ext cx="0" cy="0"/>
+          <a:chOff x="0" y="0"/>
+          <a:chExt cx="0" cy="0"/>
+        </a:xfrm>
+      </p:grpSpPr>
+      <p:sp>
+        <p:nvSpPr>
+          <p:cNvPr id="2" name="Slide Image Placeholder 1"/>
+          <p:cNvSpPr>
+            <a:spLocks noGrp="1" noRot="1" noChangeAspect="1"/>
+          </p:cNvSpPr>
+          <p:nvPr>
+            <p:ph type="sldImg"/>
+          </p:nvPr>
+        </p:nvSpPr>
+        <p:spPr/>
+      </p:sp>
+      <p:sp>
+        <p:nvSpPr>
+          <p:cNvPr id="3" name="Notes Placeholder 2"/>
+          <p:cNvSpPr>
+            <a:spLocks noGrp="1"/>
+          </p:cNvSpPr>
+          <p:nvPr>
+            <p:ph type="body" idx="1"/>
+          </p:nvPr>
+        </p:nvSpPr>
+        <p:spPr/>
+        <p:txBody>
+          <a:bodyPr/>
+          <a:lstStyle/>
+          <a:p>
+            <a:r>
+              <a:rPr lang="en-US" dirty="0"/>
+              <a:t/>
+            </a:r>
+            <a:endParaRPr lang="en-US" dirty="0"/>
+          </a:p>
+        </p:txBody>
+      </p:sp>
+      <p:sp>
+        <p:nvSpPr>
+          <p:cNvPr id="4" name="Slide Number Placeholder 3"/>
+          <p:cNvSpPr>
+            <a:spLocks noGrp="1"/>
+          </p:cNvSpPr>
+          <p:nvPr>
+            <p:ph type="sldNum" sz="quarter" idx="10"/>
+          </p:nvPr>
+        </p:nvSpPr>
+        <p:spPr/>
+        <p:txBody>
+          <a:bodyPr/>
+          <a:lstStyle/>
+          <a:p>
+            <a:fld id="{F7021451-1387-4CA6-816F-3879F97B5CBC}" type="slidenum">
+              <a:rPr lang="en-US"/>
+              <a:t>7</a:t>
             </a:fld>
             <a:endParaRPr lang="en-US"/>
           </a:p>
@@ -1386,7 +1475,7 @@
         </p:nvSpPr>
         <p:spPr>
           <a:xfrm>
-            <a:off x="731520" y="1371600"/>
+            <a:off x="731520" y="1280160"/>
             <a:ext cx="10725912" cy="1280160"/>
           </a:xfrm>
           <a:prstGeom prst="rect">
@@ -1425,7 +1514,7 @@
         </p:nvSpPr>
         <p:spPr>
           <a:xfrm>
-            <a:off x="731520" y="2651760"/>
+            <a:off x="731520" y="2560320"/>
             <a:ext cx="10725912" cy="548640"/>
           </a:xfrm>
           <a:prstGeom prst="rect">
@@ -1450,7 +1539,7 @@
                 <a:ea typeface="Arial" pitchFamily="34" charset="-122"/>
                 <a:cs typeface="Arial" pitchFamily="34" charset="-120"/>
               </a:rPr>
-              <a:t>NABD  •  منصة كشف الفاقد المائي وطبقة الثقة لأنظمة التشغيل</a:t>
+              <a:t>NABD  •  طبقة التحقق: من إنذار إلى قرار مسنود بدليل ودرجة ثقة</a:t>
             </a:r>
             <a:endParaRPr lang="ar-SA" sz="2000" dirty="0"/>
           </a:p>
@@ -1464,8 +1553,8 @@
         </p:nvSpPr>
         <p:spPr>
           <a:xfrm>
-            <a:off x="731520" y="3657600"/>
-            <a:ext cx="5486400" cy="1645920"/>
+            <a:off x="731520" y="3566160"/>
+            <a:ext cx="5486400" cy="1554480"/>
           </a:xfrm>
           <a:prstGeom prst="rect">
             <a:avLst/>
@@ -1546,7 +1635,46 @@
         </p:nvSpPr>
         <p:spPr>
           <a:xfrm>
-            <a:off x="731520" y="5852160"/>
+            <a:off x="731520" y="5532120"/>
+            <a:ext cx="10725912" cy="365760"/>
+          </a:xfrm>
+          <a:prstGeom prst="rect">
+            <a:avLst/>
+          </a:prstGeom>
+          <a:noFill/>
+          <a:ln/>
+        </p:spPr>
+        <p:txBody>
+          <a:bodyPr wrap="square" lIns="0" tIns="0" rIns="0" bIns="0" rtlCol="0" anchor="ctr"/>
+          <a:lstStyle/>
+          <a:p>
+            <a:pPr rtl="1" algn="r" indent="0" marL="0">
+              <a:buNone/>
+            </a:pPr>
+            <a:r>
+              <a:rPr lang="ar-SA" altLang="en-US" sz="1200" dirty="0">
+                <a:solidFill>
+                  <a:srgbClr val="3FB8AF"/>
+                </a:solidFill>
+                <a:latin typeface="Arial" pitchFamily="34" charset="0"/>
+                <a:ea typeface="Arial" pitchFamily="34" charset="-122"/>
+                <a:cs typeface="Arial" pitchFamily="34" charset="-120"/>
+              </a:rPr>
+              <a:t>النسخة الثانية — بعد الجلسة الاستشارية مع م. عماد (شركة المياه الوطنية)</a:t>
+            </a:r>
+            <a:endParaRPr lang="ar-SA" sz="1200" dirty="0"/>
+          </a:p>
+        </p:txBody>
+      </p:sp>
+      <p:sp>
+        <p:nvSpPr>
+          <p:cNvPr id="8" name="Text 6"/>
+          <p:cNvSpPr txBox="1"/>
+          <p:nvPr/>
+        </p:nvSpPr>
+        <p:spPr>
+          <a:xfrm>
+            <a:off x="731520" y="5943600"/>
             <a:ext cx="10725912" cy="365760"/>
           </a:xfrm>
           <a:prstGeom prst="rect">
@@ -1588,6 +1716,674 @@
 <file path=ppt/slides/slide2.xml><?xml version="1.0" encoding="utf-8"?>
 <p:sld xmlns:a="http://schemas.openxmlformats.org/drawingml/2006/main" xmlns:r="http://schemas.openxmlformats.org/officeDocument/2006/relationships" xmlns:p="http://schemas.openxmlformats.org/presentationml/2006/main">
   <p:cSld name="Slide 2">
+    <p:bg>
+      <p:bgPr>
+        <a:solidFill>
+          <a:srgbClr val="FFFFFF"/>
+        </a:solidFill>
+      </p:bgPr>
+    </p:bg>
+    <p:spTree>
+      <p:nvGrpSpPr>
+        <p:cNvPr id="1" name=""/>
+        <p:cNvGrpSpPr/>
+        <p:nvPr/>
+      </p:nvGrpSpPr>
+      <p:grpSpPr>
+        <a:xfrm>
+          <a:off x="0" y="0"/>
+          <a:ext cx="0" cy="0"/>
+          <a:chOff x="0" y="0"/>
+          <a:chExt cx="0" cy="0"/>
+        </a:xfrm>
+      </p:grpSpPr>
+      <p:sp>
+        <p:nvSpPr>
+          <p:cNvPr id="2" name="Text 0"/>
+          <p:cNvSpPr txBox="1"/>
+          <p:nvPr/>
+        </p:nvSpPr>
+        <p:spPr>
+          <a:xfrm>
+            <a:off x="548640" y="320040"/>
+            <a:ext cx="11091672" cy="731520"/>
+          </a:xfrm>
+          <a:prstGeom prst="rect">
+            <a:avLst/>
+          </a:prstGeom>
+          <a:noFill/>
+          <a:ln/>
+        </p:spPr>
+        <p:txBody>
+          <a:bodyPr wrap="square" lIns="0" tIns="0" rIns="0" bIns="0" rtlCol="0" anchor="ctr"/>
+          <a:lstStyle/>
+          <a:p>
+            <a:pPr rtl="1" algn="r" indent="0" marL="0">
+              <a:buNone/>
+            </a:pPr>
+            <a:r>
+              <a:rPr lang="ar-SA" altLang="en-US" sz="3200" b="1" dirty="0">
+                <a:solidFill>
+                  <a:srgbClr val="0B3C5D"/>
+                </a:solidFill>
+                <a:latin typeface="Arial" pitchFamily="34" charset="0"/>
+                <a:ea typeface="Arial" pitchFamily="34" charset="-122"/>
+                <a:cs typeface="Arial" pitchFamily="34" charset="-120"/>
+              </a:rPr>
+              <a:t>أين تقع نبض؟ لا نكرر الموجود</a:t>
+            </a:r>
+            <a:endParaRPr lang="ar-SA" sz="3200" dirty="0"/>
+          </a:p>
+        </p:txBody>
+      </p:sp>
+      <p:sp>
+        <p:nvSpPr>
+          <p:cNvPr id="3" name="Text 1"/>
+          <p:cNvSpPr txBox="1"/>
+          <p:nvPr/>
+        </p:nvSpPr>
+        <p:spPr>
+          <a:xfrm>
+            <a:off x="548640" y="1005840"/>
+            <a:ext cx="11091672" cy="365760"/>
+          </a:xfrm>
+          <a:prstGeom prst="rect">
+            <a:avLst/>
+          </a:prstGeom>
+          <a:noFill/>
+          <a:ln/>
+        </p:spPr>
+        <p:txBody>
+          <a:bodyPr wrap="square" lIns="0" tIns="0" rIns="0" bIns="0" rtlCol="0" anchor="ctr"/>
+          <a:lstStyle/>
+          <a:p>
+            <a:pPr rtl="1" algn="r" indent="0" marL="0">
+              <a:buNone/>
+            </a:pPr>
+            <a:r>
+              <a:rPr lang="ar-SA" altLang="en-US" sz="1400" dirty="0">
+                <a:solidFill>
+                  <a:srgbClr val="5B6B7A"/>
+                </a:solidFill>
+                <a:latin typeface="Arial" pitchFamily="34" charset="0"/>
+                <a:ea typeface="Arial" pitchFamily="34" charset="-122"/>
+                <a:cs typeface="Arial" pitchFamily="34" charset="-120"/>
+              </a:rPr>
+              <a:t>المشغّل يملك منذ سنوات أنظمة كشف ومتابعة؛ الفجوة ليست في القياس بل في التحقق</a:t>
+            </a:r>
+            <a:endParaRPr lang="ar-SA" sz="1400" dirty="0"/>
+          </a:p>
+        </p:txBody>
+      </p:sp>
+      <p:sp>
+        <p:nvSpPr>
+          <p:cNvPr id="4" name="Shape 2"/>
+          <p:cNvSpPr/>
+          <p:nvPr/>
+        </p:nvSpPr>
+        <p:spPr>
+          <a:xfrm>
+            <a:off x="6231636" y="1600200"/>
+            <a:ext cx="5408676" cy="3246120"/>
+          </a:xfrm>
+          <a:prstGeom prst="roundRect">
+            <a:avLst>
+              <a:gd name="adj" fmla="val 3380"/>
+            </a:avLst>
+          </a:prstGeom>
+          <a:solidFill>
+            <a:srgbClr val="F4F7F9"/>
+          </a:solidFill>
+          <a:ln w="9525">
+            <a:solidFill>
+              <a:srgbClr val="D5E3EA"/>
+            </a:solidFill>
+            <a:prstDash val="solid"/>
+          </a:ln>
+          <a:effectLst>
+            <a:outerShdw sx="100000" sy="100000" kx="0" ky="0" algn="bl" rotWithShape="0" blurRad="50800" dist="19050" dir="5400000">
+              <a:srgbClr val="000000">
+                <a:alpha val="10000"/>
+              </a:srgbClr>
+            </a:outerShdw>
+          </a:effectLst>
+        </p:spPr>
+      </p:sp>
+      <p:sp>
+        <p:nvSpPr>
+          <p:cNvPr id="5" name="Text 3"/>
+          <p:cNvSpPr txBox="1"/>
+          <p:nvPr/>
+        </p:nvSpPr>
+        <p:spPr>
+          <a:xfrm>
+            <a:off x="6414516" y="1709928"/>
+            <a:ext cx="5042916" cy="365760"/>
+          </a:xfrm>
+          <a:prstGeom prst="rect">
+            <a:avLst/>
+          </a:prstGeom>
+          <a:noFill/>
+          <a:ln/>
+        </p:spPr>
+        <p:txBody>
+          <a:bodyPr wrap="square" lIns="0" tIns="0" rIns="0" bIns="0" rtlCol="0" anchor="ctr"/>
+          <a:lstStyle/>
+          <a:p>
+            <a:pPr rtl="1" algn="r" indent="0" marL="0">
+              <a:buNone/>
+            </a:pPr>
+            <a:r>
+              <a:rPr lang="ar-SA" altLang="en-US" sz="1400" b="1" dirty="0">
+                <a:solidFill>
+                  <a:srgbClr val="5B6B7A"/>
+                </a:solidFill>
+                <a:latin typeface="Arial" pitchFamily="34" charset="0"/>
+                <a:ea typeface="Arial" pitchFamily="34" charset="-122"/>
+                <a:cs typeface="Arial" pitchFamily="34" charset="-120"/>
+              </a:rPr>
+              <a:t>موجود أصلاً لدى المشغّل — خارج نطاقنا</a:t>
+            </a:r>
+            <a:endParaRPr lang="ar-SA" sz="1400" dirty="0"/>
+          </a:p>
+        </p:txBody>
+      </p:sp>
+      <p:sp>
+        <p:nvSpPr>
+          <p:cNvPr id="6" name="Text 4"/>
+          <p:cNvSpPr txBox="1"/>
+          <p:nvPr/>
+        </p:nvSpPr>
+        <p:spPr>
+          <a:xfrm>
+            <a:off x="6414516" y="2103120"/>
+            <a:ext cx="5042916" cy="2606040"/>
+          </a:xfrm>
+          <a:prstGeom prst="rect">
+            <a:avLst/>
+          </a:prstGeom>
+          <a:noFill/>
+          <a:ln/>
+        </p:spPr>
+        <p:txBody>
+          <a:bodyPr wrap="square" lIns="0" tIns="0" rIns="0" bIns="0" rtlCol="0" anchor="t"/>
+          <a:lstStyle/>
+          <a:p>
+            <a:pPr algn="r" marL="152400" indent="-152400">
+              <a:spcAft>
+                <a:spcPts val="400"/>
+              </a:spcAft>
+              <a:buSzPct val="100000"/>
+              <a:buChar char="•"/>
+            </a:pPr>
+            <a:r>
+              <a:rPr lang="ar-SA" altLang="en-US" sz="1200" dirty="0">
+                <a:solidFill>
+                  <a:srgbClr val="1F2933"/>
+                </a:solidFill>
+                <a:latin typeface="Arial" pitchFamily="34" charset="0"/>
+                <a:ea typeface="Arial" pitchFamily="34" charset="-122"/>
+                <a:cs typeface="Arial" pitchFamily="34" charset="-120"/>
+              </a:rPr>
+              <a:t>أنظمة كشف التسرب (Leak Detection) وأجهزة وحساسات موزعة في الشبكة</a:t>
+            </a:r>
+            <a:endParaRPr lang="ar-SA" sz="1200" dirty="0"/>
+          </a:p>
+          <a:p>
+            <a:pPr algn="r" marL="152400" indent="-152400">
+              <a:spcAft>
+                <a:spcPts val="400"/>
+              </a:spcAft>
+              <a:buSzPct val="100000"/>
+              <a:buChar char="•"/>
+            </a:pPr>
+            <a:r>
+              <a:rPr lang="ar-SA" altLang="en-US" sz="1200" dirty="0">
+                <a:solidFill>
+                  <a:srgbClr val="1F2933"/>
+                </a:solidFill>
+                <a:latin typeface="Arial" pitchFamily="34" charset="0"/>
+                <a:ea typeface="Arial" pitchFamily="34" charset="-122"/>
+                <a:cs typeface="Arial" pitchFamily="34" charset="-120"/>
+              </a:rPr>
+              <a:t>منصات متابعة الفاقد غير المحاسب (NRW) ونسب الفقد اللحظية على مستوى المناطق</a:t>
+            </a:r>
+            <a:endParaRPr lang="ar-SA" sz="1200" dirty="0"/>
+          </a:p>
+          <a:p>
+            <a:pPr algn="r" marL="152400" indent="-152400">
+              <a:spcAft>
+                <a:spcPts val="400"/>
+              </a:spcAft>
+              <a:buSzPct val="100000"/>
+              <a:buChar char="•"/>
+            </a:pPr>
+            <a:r>
+              <a:rPr lang="ar-SA" altLang="en-US" sz="1200" dirty="0">
+                <a:solidFill>
+                  <a:srgbClr val="1F2933"/>
+                </a:solidFill>
+                <a:latin typeface="Arial" pitchFamily="34" charset="0"/>
+                <a:ea typeface="Arial" pitchFamily="34" charset="-122"/>
+                <a:cs typeface="Arial" pitchFamily="34" charset="-120"/>
+              </a:rPr>
+              <a:t>التوأم الرقمي والخرائط الرقمية (Digital Twin / Digital Mapping)</a:t>
+            </a:r>
+            <a:endParaRPr lang="ar-SA" sz="1200" dirty="0"/>
+          </a:p>
+          <a:p>
+            <a:pPr algn="r" marL="152400" indent="-152400">
+              <a:spcAft>
+                <a:spcPts val="400"/>
+              </a:spcAft>
+              <a:buSzPct val="100000"/>
+              <a:buChar char="•"/>
+            </a:pPr>
+            <a:r>
+              <a:rPr lang="ar-SA" altLang="en-US" sz="1200" dirty="0">
+                <a:solidFill>
+                  <a:srgbClr val="1F2933"/>
+                </a:solidFill>
+                <a:latin typeface="Arial" pitchFamily="34" charset="0"/>
+                <a:ea typeface="Arial" pitchFamily="34" charset="-122"/>
+                <a:cs typeface="Arial" pitchFamily="34" charset="-120"/>
+              </a:rPr>
+              <a:t>أوامر العمل للتسريبات والانكسارات، وبيانات تصل إلى مستوى محابس العزل</a:t>
+            </a:r>
+            <a:endParaRPr lang="ar-SA" sz="1200" dirty="0"/>
+          </a:p>
+        </p:txBody>
+      </p:sp>
+      <p:sp>
+        <p:nvSpPr>
+          <p:cNvPr id="7" name="Shape 5"/>
+          <p:cNvSpPr/>
+          <p:nvPr/>
+        </p:nvSpPr>
+        <p:spPr>
+          <a:xfrm>
+            <a:off x="548640" y="1600200"/>
+            <a:ext cx="5408676" cy="3246120"/>
+          </a:xfrm>
+          <a:prstGeom prst="roundRect">
+            <a:avLst>
+              <a:gd name="adj" fmla="val 3380"/>
+            </a:avLst>
+          </a:prstGeom>
+          <a:solidFill>
+            <a:srgbClr val="EAF4F7"/>
+          </a:solidFill>
+          <a:ln w="9525">
+            <a:solidFill>
+              <a:srgbClr val="D5E3EA"/>
+            </a:solidFill>
+            <a:prstDash val="solid"/>
+          </a:ln>
+          <a:effectLst>
+            <a:outerShdw sx="100000" sy="100000" kx="0" ky="0" algn="bl" rotWithShape="0" blurRad="50800" dist="19050" dir="5400000">
+              <a:srgbClr val="000000">
+                <a:alpha val="10000"/>
+              </a:srgbClr>
+            </a:outerShdw>
+          </a:effectLst>
+        </p:spPr>
+      </p:sp>
+      <p:sp>
+        <p:nvSpPr>
+          <p:cNvPr id="8" name="Text 6"/>
+          <p:cNvSpPr txBox="1"/>
+          <p:nvPr/>
+        </p:nvSpPr>
+        <p:spPr>
+          <a:xfrm>
+            <a:off x="731520" y="1709928"/>
+            <a:ext cx="5042916" cy="365760"/>
+          </a:xfrm>
+          <a:prstGeom prst="rect">
+            <a:avLst/>
+          </a:prstGeom>
+          <a:noFill/>
+          <a:ln/>
+        </p:spPr>
+        <p:txBody>
+          <a:bodyPr wrap="square" lIns="0" tIns="0" rIns="0" bIns="0" rtlCol="0" anchor="ctr"/>
+          <a:lstStyle/>
+          <a:p>
+            <a:pPr rtl="1" algn="r" indent="0" marL="0">
+              <a:buNone/>
+            </a:pPr>
+            <a:r>
+              <a:rPr lang="ar-SA" altLang="en-US" sz="1400" b="1" dirty="0">
+                <a:solidFill>
+                  <a:srgbClr val="0B3C5D"/>
+                </a:solidFill>
+                <a:latin typeface="Arial" pitchFamily="34" charset="0"/>
+                <a:ea typeface="Arial" pitchFamily="34" charset="-122"/>
+                <a:cs typeface="Arial" pitchFamily="34" charset="-120"/>
+              </a:rPr>
+              <a:t>الفجوة التي تملؤها نبض</a:t>
+            </a:r>
+            <a:endParaRPr lang="ar-SA" sz="1400" dirty="0"/>
+          </a:p>
+        </p:txBody>
+      </p:sp>
+      <p:sp>
+        <p:nvSpPr>
+          <p:cNvPr id="9" name="Text 7"/>
+          <p:cNvSpPr txBox="1"/>
+          <p:nvPr/>
+        </p:nvSpPr>
+        <p:spPr>
+          <a:xfrm>
+            <a:off x="731520" y="2103120"/>
+            <a:ext cx="5042916" cy="2606040"/>
+          </a:xfrm>
+          <a:prstGeom prst="rect">
+            <a:avLst/>
+          </a:prstGeom>
+          <a:noFill/>
+          <a:ln/>
+        </p:spPr>
+        <p:txBody>
+          <a:bodyPr wrap="square" lIns="0" tIns="0" rIns="0" bIns="0" rtlCol="0" anchor="t"/>
+          <a:lstStyle/>
+          <a:p>
+            <a:pPr algn="r" marL="152400" indent="-152400">
+              <a:spcAft>
+                <a:spcPts val="400"/>
+              </a:spcAft>
+              <a:buSzPct val="100000"/>
+              <a:buChar char="•"/>
+            </a:pPr>
+            <a:r>
+              <a:rPr lang="ar-SA" altLang="en-US" sz="1200" dirty="0">
+                <a:solidFill>
+                  <a:srgbClr val="1F2933"/>
+                </a:solidFill>
+                <a:latin typeface="Arial" pitchFamily="34" charset="0"/>
+                <a:ea typeface="Arial" pitchFamily="34" charset="-122"/>
+                <a:cs typeface="Arial" pitchFamily="34" charset="-120"/>
+              </a:rPr>
+              <a:t>كل حدث مرشح يصل اليوم كإنذار أو انحراف — بلا درجة ثقة ولا دليل يفسر سببه</a:t>
+            </a:r>
+            <a:endParaRPr lang="ar-SA" sz="1200" dirty="0"/>
+          </a:p>
+          <a:p>
+            <a:pPr algn="r" marL="152400" indent="-152400">
+              <a:spcAft>
+                <a:spcPts val="400"/>
+              </a:spcAft>
+              <a:buSzPct val="100000"/>
+              <a:buChar char="•"/>
+            </a:pPr>
+            <a:r>
+              <a:rPr lang="ar-SA" altLang="en-US" sz="1200" dirty="0">
+                <a:solidFill>
+                  <a:srgbClr val="1F2933"/>
+                </a:solidFill>
+                <a:latin typeface="Arial" pitchFamily="34" charset="0"/>
+                <a:ea typeface="Arial" pitchFamily="34" charset="-122"/>
+                <a:cs typeface="Arial" pitchFamily="34" charset="-120"/>
+              </a:rPr>
+              <a:t>لا تمييز منهجي بين: انكسار مؤكد / عطل في الحساس / تغير طبيعي في الطلب</a:t>
+            </a:r>
+            <a:endParaRPr lang="ar-SA" sz="1200" dirty="0"/>
+          </a:p>
+          <a:p>
+            <a:pPr algn="r" marL="152400" indent="-152400">
+              <a:spcAft>
+                <a:spcPts val="400"/>
+              </a:spcAft>
+              <a:buSzPct val="100000"/>
+              <a:buChar char="•"/>
+            </a:pPr>
+            <a:r>
+              <a:rPr lang="ar-SA" altLang="en-US" sz="1200" dirty="0">
+                <a:solidFill>
+                  <a:srgbClr val="1F2933"/>
+                </a:solidFill>
+                <a:latin typeface="Arial" pitchFamily="34" charset="0"/>
+                <a:ea typeface="Arial" pitchFamily="34" charset="-122"/>
+                <a:cs typeface="Arial" pitchFamily="34" charset="-120"/>
+              </a:rPr>
+              <a:t>لا قراءة للتوقيع الهيدروليكي المحلي حول موقع الحدث لدعم أو نفي الفرضية</a:t>
+            </a:r>
+            <a:endParaRPr lang="ar-SA" sz="1200" dirty="0"/>
+          </a:p>
+          <a:p>
+            <a:pPr algn="r" marL="152400" indent="-152400">
+              <a:spcAft>
+                <a:spcPts val="400"/>
+              </a:spcAft>
+              <a:buSzPct val="100000"/>
+              <a:buChar char="•"/>
+            </a:pPr>
+            <a:r>
+              <a:rPr lang="ar-SA" altLang="en-US" sz="1200" dirty="0">
+                <a:solidFill>
+                  <a:srgbClr val="1F2933"/>
+                </a:solidFill>
+                <a:latin typeface="Arial" pitchFamily="34" charset="0"/>
+                <a:ea typeface="Arial" pitchFamily="34" charset="-122"/>
+                <a:cs typeface="Arial" pitchFamily="34" charset="-120"/>
+              </a:rPr>
+              <a:t>المسار المقترح: دليل ← درجة ثقة ← تحقق ← قرار (Evidence → Confidence → Verification → Decision)</a:t>
+            </a:r>
+            <a:endParaRPr lang="ar-SA" sz="1200" dirty="0"/>
+          </a:p>
+        </p:txBody>
+      </p:sp>
+      <p:sp>
+        <p:nvSpPr>
+          <p:cNvPr id="10" name="Shape 8"/>
+          <p:cNvSpPr/>
+          <p:nvPr/>
+        </p:nvSpPr>
+        <p:spPr>
+          <a:xfrm>
+            <a:off x="548640" y="5029200"/>
+            <a:ext cx="11091672" cy="1143000"/>
+          </a:xfrm>
+          <a:prstGeom prst="roundRect">
+            <a:avLst>
+              <a:gd name="adj" fmla="val 9600"/>
+            </a:avLst>
+          </a:prstGeom>
+          <a:solidFill>
+            <a:srgbClr val="0B3C5D"/>
+          </a:solidFill>
+          <a:ln w="12700">
+            <a:solidFill>
+              <a:srgbClr val="0B3C5D"/>
+            </a:solidFill>
+            <a:prstDash val="solid"/>
+          </a:ln>
+        </p:spPr>
+      </p:sp>
+      <p:sp>
+        <p:nvSpPr>
+          <p:cNvPr id="11" name="Text 9"/>
+          <p:cNvSpPr txBox="1"/>
+          <p:nvPr/>
+        </p:nvSpPr>
+        <p:spPr>
+          <a:xfrm>
+            <a:off x="822960" y="5138928"/>
+            <a:ext cx="10543032" cy="320040"/>
+          </a:xfrm>
+          <a:prstGeom prst="rect">
+            <a:avLst/>
+          </a:prstGeom>
+          <a:noFill/>
+          <a:ln/>
+        </p:spPr>
+        <p:txBody>
+          <a:bodyPr wrap="square" lIns="0" tIns="0" rIns="0" bIns="0" rtlCol="0" anchor="ctr"/>
+          <a:lstStyle/>
+          <a:p>
+            <a:pPr rtl="1" algn="r" indent="0" marL="0">
+              <a:buNone/>
+            </a:pPr>
+            <a:r>
+              <a:rPr lang="ar-SA" altLang="en-US" sz="1300" b="1" dirty="0">
+                <a:solidFill>
+                  <a:srgbClr val="3FB8AF"/>
+                </a:solidFill>
+                <a:latin typeface="Arial" pitchFamily="34" charset="0"/>
+                <a:ea typeface="Arial" pitchFamily="34" charset="-122"/>
+                <a:cs typeface="Arial" pitchFamily="34" charset="-120"/>
+              </a:rPr>
+              <a:t>حدود النطاق الفني (مصححة بعد الجلسة الاستشارية)</a:t>
+            </a:r>
+            <a:endParaRPr lang="ar-SA" sz="1300" dirty="0"/>
+          </a:p>
+        </p:txBody>
+      </p:sp>
+      <p:sp>
+        <p:nvSpPr>
+          <p:cNvPr id="12" name="Text 10"/>
+          <p:cNvSpPr txBox="1"/>
+          <p:nvPr/>
+        </p:nvSpPr>
+        <p:spPr>
+          <a:xfrm>
+            <a:off x="822960" y="5468112"/>
+            <a:ext cx="10543032" cy="640080"/>
+          </a:xfrm>
+          <a:prstGeom prst="rect">
+            <a:avLst/>
+          </a:prstGeom>
+          <a:noFill/>
+          <a:ln/>
+        </p:spPr>
+        <p:txBody>
+          <a:bodyPr wrap="square" lIns="0" tIns="0" rIns="0" bIns="0" rtlCol="0" anchor="t"/>
+          <a:lstStyle/>
+          <a:p>
+            <a:pPr algn="r" indent="0" marL="0">
+              <a:buNone/>
+            </a:pPr>
+            <a:r>
+              <a:rPr lang="ar-SA" altLang="en-US" sz="1150" dirty="0">
+                <a:solidFill>
+                  <a:srgbClr val="FFFFFF"/>
+                </a:solidFill>
+                <a:latin typeface="Arial" pitchFamily="34" charset="0"/>
+                <a:ea typeface="Arial" pitchFamily="34" charset="-122"/>
+                <a:cs typeface="Arial" pitchFamily="34" charset="-120"/>
+              </a:rPr>
+              <a:t>أجهزة كشف التسرب والضغط للقراءة فقط (Read-only) باتصال أحادي الاتجاه ولا تستقبل أوامر — فلا يقوم الحل على فرضية التلاعب المباشر بالحساس.</a:t>
+            </a:r>
+            <a:endParaRPr lang="ar-SA" sz="1150" dirty="0"/>
+          </a:p>
+          <a:p>
+            <a:pPr algn="r" indent="0" marL="0">
+              <a:buNone/>
+            </a:pPr>
+            <a:r>
+              <a:rPr lang="ar-SA" altLang="en-US" sz="1150" dirty="0">
+                <a:solidFill>
+                  <a:srgbClr val="FFFFFF"/>
+                </a:solidFill>
+                <a:latin typeface="Arial" pitchFamily="34" charset="0"/>
+                <a:ea typeface="Arial" pitchFamily="34" charset="-122"/>
+                <a:cs typeface="Arial" pitchFamily="34" charset="-120"/>
+              </a:rPr>
+              <a:t>القياسات وقراءات الحساسات على IT، والتحكم على OT — ونبض تعمل على بيانات القياس فقط، بلا أي تحكم أو أوامر إلى المعدات.</a:t>
+            </a:r>
+            <a:endParaRPr lang="ar-SA" sz="1150" dirty="0"/>
+          </a:p>
+        </p:txBody>
+      </p:sp>
+      <p:sp>
+        <p:nvSpPr>
+          <p:cNvPr id="13" name="Text 11"/>
+          <p:cNvSpPr txBox="1"/>
+          <p:nvPr/>
+        </p:nvSpPr>
+        <p:spPr>
+          <a:xfrm>
+            <a:off x="548640" y="6446520"/>
+            <a:ext cx="7315200" cy="274320"/>
+          </a:xfrm>
+          <a:prstGeom prst="rect">
+            <a:avLst/>
+          </a:prstGeom>
+          <a:noFill/>
+          <a:ln/>
+        </p:spPr>
+        <p:txBody>
+          <a:bodyPr wrap="square" lIns="0" tIns="0" rIns="0" bIns="0" rtlCol="0" anchor="ctr"/>
+          <a:lstStyle/>
+          <a:p>
+            <a:pPr rtl="1" algn="r" indent="0" marL="0">
+              <a:buNone/>
+            </a:pPr>
+            <a:r>
+              <a:rPr lang="ar-SA" altLang="en-US" sz="900" dirty="0">
+                <a:solidFill>
+                  <a:srgbClr val="5B6B7A"/>
+                </a:solidFill>
+                <a:latin typeface="Arial" pitchFamily="34" charset="0"/>
+                <a:ea typeface="Arial" pitchFamily="34" charset="-122"/>
+                <a:cs typeface="Arial" pitchFamily="34" charset="-120"/>
+              </a:rPr>
+              <a:t>نبض NABD  |  طبقة التحقق من أحداث التسرب في شبكات المياه</a:t>
+            </a:r>
+            <a:endParaRPr lang="ar-SA" sz="900" dirty="0"/>
+          </a:p>
+        </p:txBody>
+      </p:sp>
+      <p:sp>
+        <p:nvSpPr>
+          <p:cNvPr id="14" name="Text 12"/>
+          <p:cNvSpPr txBox="1"/>
+          <p:nvPr/>
+        </p:nvSpPr>
+        <p:spPr>
+          <a:xfrm>
+            <a:off x="11091672" y="6446520"/>
+            <a:ext cx="548640" cy="274320"/>
+          </a:xfrm>
+          <a:prstGeom prst="rect">
+            <a:avLst/>
+          </a:prstGeom>
+          <a:noFill/>
+          <a:ln/>
+        </p:spPr>
+        <p:txBody>
+          <a:bodyPr wrap="square" lIns="0" tIns="0" rIns="0" bIns="0" rtlCol="0" anchor="ctr"/>
+          <a:lstStyle/>
+          <a:p>
+            <a:pPr rtl="1" algn="l" indent="0" marL="0">
+              <a:buNone/>
+            </a:pPr>
+            <a:r>
+              <a:rPr lang="ar-SA" altLang="en-US" sz="900" dirty="0">
+                <a:solidFill>
+                  <a:srgbClr val="5B6B7A"/>
+                </a:solidFill>
+                <a:latin typeface="Arial" pitchFamily="34" charset="0"/>
+                <a:ea typeface="Arial" pitchFamily="34" charset="-122"/>
+                <a:cs typeface="Arial" pitchFamily="34" charset="-120"/>
+              </a:rPr>
+              <a:t>2</a:t>
+            </a:r>
+            <a:endParaRPr lang="ar-SA" sz="900" dirty="0"/>
+          </a:p>
+        </p:txBody>
+      </p:sp>
+    </p:spTree>
+  </p:cSld>
+  <p:clrMapOvr>
+    <a:masterClrMapping/>
+  </p:clrMapOvr>
+</p:sld>
+</file>
+
+<file path=ppt/slides/slide3.xml><?xml version="1.0" encoding="utf-8"?>
+<p:sld xmlns:a="http://schemas.openxmlformats.org/drawingml/2006/main" xmlns:r="http://schemas.openxmlformats.org/officeDocument/2006/relationships" xmlns:p="http://schemas.openxmlformats.org/presentationml/2006/main">
+  <p:cSld name="Slide 3">
     <p:bg>
       <p:bgPr>
         <a:solidFill>
@@ -1797,7 +2593,7 @@
                 <a:ea typeface="Arial" pitchFamily="34" charset="-122"/>
                 <a:cs typeface="Arial" pitchFamily="34" charset="-120"/>
               </a:rPr>
-              <a:t>جهات تشغيل وإدارة شبكات المياه (مثل الشركة الوطنية للمياه) والمدن الصناعية</a:t>
+              <a:t>فرق تشغيل وصيانة شبكات التوزيع التي تتلقى الأحداث وتقرر إرسال الفرق الميدانية</a:t>
             </a:r>
             <a:endParaRPr lang="ar-SA" sz="1200" dirty="0"/>
           </a:p>
@@ -1818,7 +2614,7 @@
                 <a:ea typeface="Arial" pitchFamily="34" charset="-122"/>
                 <a:cs typeface="Arial" pitchFamily="34" charset="-120"/>
               </a:rPr>
-              <a:t>فرق التشغيل والصيانة وإدارات الأمن السيبراني للأنظمة التشغيلية (OT)</a:t>
+              <a:t>غرف التحكم ومحللو الفاقد الذين يبنون مؤشرات NRW على قراءات قد تكون غير سليمة</a:t>
             </a:r>
             <a:endParaRPr lang="ar-SA" sz="1200" dirty="0"/>
           </a:p>
@@ -1839,7 +2635,7 @@
                 <a:ea typeface="Arial" pitchFamily="34" charset="-122"/>
                 <a:cs typeface="Arial" pitchFamily="34" charset="-120"/>
               </a:rPr>
-              <a:t>المشتركون (المستفيد النهائي) الذين يتحملون فواتير مرتفعة بسبب تسربات لا يرونها</a:t>
+              <a:t>المشتركون: تأخر معالجة الانكسار الحقيقي يعني انقطاعاً أو فاتورة مرتفعة</a:t>
             </a:r>
             <a:endParaRPr lang="ar-SA" sz="1200" dirty="0"/>
           </a:p>
@@ -1860,7 +2656,7 @@
                 <a:ea typeface="Arial" pitchFamily="34" charset="-122"/>
                 <a:cs typeface="Arial" pitchFamily="34" charset="-120"/>
               </a:rPr>
-              <a:t>المجتمع والبيئة: موارد مائية شحيحة وطاقة ضخ مهدرة</a:t>
+              <a:t>الجهة المشغلة: كلفة زيارات ميدانية لا ينتج عنها تسرب مؤكد</a:t>
             </a:r>
             <a:endParaRPr lang="ar-SA" sz="1200" dirty="0"/>
           </a:p>
@@ -1976,7 +2772,7 @@
                 <a:ea typeface="Arial" pitchFamily="34" charset="-122"/>
                 <a:cs typeface="Arial" pitchFamily="34" charset="-120"/>
               </a:rPr>
-              <a:t>ارتفاع الفاقد غير المحاسب (NRW) بسبب تسربات غير مرئية لا تُكتشف إلا بعد ظهورها على السطح أو وصول شكوى</a:t>
+              <a:t>(وصف الظاهرة لا الحل) الحدث المرشح يصل إلى متخذ القرار دون درجة ثقة ودون دليل يفسر سببه</a:t>
             </a:r>
             <a:endParaRPr lang="ar-SA" sz="1200" dirty="0"/>
           </a:p>
@@ -1997,7 +2793,7 @@
                 <a:ea typeface="Arial" pitchFamily="34" charset="-122"/>
                 <a:cs typeface="Arial" pitchFamily="34" charset="-120"/>
               </a:rPr>
-              <a:t>الإنذارات الحالية لا تميز بين تسرب حقيقي، عطل حساس، أو تلاعب في بيانات أنظمة التحكم (PLC/RTU)</a:t>
+              <a:t>لا يوجد تمييز منهجي بين انكسار مؤكد، وعطل في الحساس، وتغير طبيعي في الطلب</a:t>
             </a:r>
             <a:endParaRPr lang="ar-SA" sz="1200" dirty="0"/>
           </a:p>
@@ -2018,7 +2814,7 @@
                 <a:ea typeface="Arial" pitchFamily="34" charset="-122"/>
                 <a:cs typeface="Arial" pitchFamily="34" charset="-120"/>
               </a:rPr>
-              <a:t>زمن الاكتشاف يُقاس بالأيام والأسابيع، وتحديد الموقع يعتمد على البحث الميداني العشوائي</a:t>
+              <a:t>الحكم يعتمد على خبرة الشخص المناوب، فتتفاوت القرارات على الحدث نفسه</a:t>
             </a:r>
             <a:endParaRPr lang="ar-SA" sz="1200" dirty="0"/>
           </a:p>
@@ -2039,7 +2835,7 @@
                 <a:ea typeface="Arial" pitchFamily="34" charset="-122"/>
                 <a:cs typeface="Arial" pitchFamily="34" charset="-120"/>
               </a:rPr>
-              <a:t>ملاحظة: الوصف أعلاه يصف الظاهرة لا الحل</a:t>
+              <a:t>النتيجة: جهد ميداني يُصرف على أحداث غير مؤكدة، وأحداث حقيقية تنتظر في الطابور</a:t>
             </a:r>
             <a:endParaRPr lang="ar-SA" sz="1200" dirty="0"/>
           </a:p>
@@ -2155,7 +2951,7 @@
                 <a:ea typeface="Arial" pitchFamily="34" charset="-122"/>
                 <a:cs typeface="Arial" pitchFamily="34" charset="-120"/>
               </a:rPr>
-              <a:t>المرحلة: نقل وتوزيع المياه، وداخل منشآت المشتركين</a:t>
+              <a:t>المرحلة: اللحظة الفاصلة بين رصد الحدث وإصدار أمر العمل — لا في القياس ولا في التنفيذ</a:t>
             </a:r>
             <a:endParaRPr lang="ar-SA" sz="1200" dirty="0"/>
           </a:p>
@@ -2176,7 +2972,7 @@
                 <a:ea typeface="Arial" pitchFamily="34" charset="-122"/>
                 <a:cs typeface="Arial" pitchFamily="34" charset="-120"/>
               </a:rPr>
-              <a:t>الموقع: شبكات تتجاوز 134,000 كم على المستوى الوطني، مع تجربة تطبيقية مقترحة في الجبيل</a:t>
+              <a:t>الموقع: شبكات التوزيع ومحيط نقطة الانكسار؛ الأثر محلي عند الموقع وما حوله لا على مستوى المنطقة أو المضخة</a:t>
             </a:r>
             <a:endParaRPr lang="ar-SA" sz="1200" dirty="0"/>
           </a:p>
@@ -2197,7 +2993,7 @@
                 <a:ea typeface="Arial" pitchFamily="34" charset="-122"/>
                 <a:cs typeface="Arial" pitchFamily="34" charset="-120"/>
               </a:rPr>
-              <a:t>الظروف: على مدار الساعة، وتتفاقم مع تقادم الأصول، تذبذب الضغط ليلاً، وغياب المراقبة اللحظية لكل مقطع</a:t>
+              <a:t>الظروف: على مدار الساعة، وتشتد وقت ذروة الطلب حين تتشابه إشارة الانكسار مع التغير الطبيعي</a:t>
             </a:r>
             <a:endParaRPr lang="ar-SA" sz="1200" dirty="0"/>
           </a:p>
@@ -2218,7 +3014,7 @@
                 <a:ea typeface="Arial" pitchFamily="34" charset="-122"/>
                 <a:cs typeface="Arial" pitchFamily="34" charset="-120"/>
               </a:rPr>
-              <a:t>تظهر أيضاً عند مراجعة الفواتير المرتفعة (أكثر من 90% منها سببها تسربات فنية)</a:t>
+              <a:t>تشتد كذلك عند تقادم الحساس أو انحراف معايرته</a:t>
             </a:r>
             <a:endParaRPr lang="ar-SA" sz="1200" dirty="0"/>
           </a:p>
@@ -2257,7 +3053,7 @@
                 <a:ea typeface="Arial" pitchFamily="34" charset="-122"/>
                 <a:cs typeface="Arial" pitchFamily="34" charset="-120"/>
               </a:rPr>
-              <a:t>نبض NABD  |  حل كشف الفاقد والتسربات في شبكات المياه</a:t>
+              <a:t>نبض NABD  |  طبقة التحقق من أحداث التسرب في شبكات المياه</a:t>
             </a:r>
             <a:endParaRPr lang="ar-SA" sz="900" dirty="0"/>
           </a:p>
@@ -2296,7 +3092,7 @@
                 <a:ea typeface="Arial" pitchFamily="34" charset="-122"/>
                 <a:cs typeface="Arial" pitchFamily="34" charset="-120"/>
               </a:rPr>
-              <a:t>2</a:t>
+              <a:t>3</a:t>
             </a:r>
             <a:endParaRPr lang="ar-SA" sz="900" dirty="0"/>
           </a:p>
@@ -2310,9 +3106,9 @@
 </p:sld>
 </file>
 
-<file path=ppt/slides/slide3.xml><?xml version="1.0" encoding="utf-8"?>
+<file path=ppt/slides/slide4.xml><?xml version="1.0" encoding="utf-8"?>
 <p:sld xmlns:a="http://schemas.openxmlformats.org/drawingml/2006/main" xmlns:r="http://schemas.openxmlformats.org/officeDocument/2006/relationships" xmlns:p="http://schemas.openxmlformats.org/presentationml/2006/main">
-  <p:cSld name="Slide 3">
+  <p:cSld name="Slide 4">
     <p:bg>
       <p:bgPr>
         <a:solidFill>
@@ -2511,8 +3307,8 @@
         </p:nvSpPr>
         <p:spPr>
           <a:xfrm>
-            <a:off x="7479792" y="1664208"/>
-            <a:ext cx="3291840" cy="621792"/>
+            <a:off x="7022592" y="1645920"/>
+            <a:ext cx="3749040" cy="658368"/>
           </a:xfrm>
           <a:prstGeom prst="rect">
             <a:avLst/>
@@ -2528,7 +3324,7 @@
               <a:buNone/>
             </a:pPr>
             <a:r>
-              <a:rPr lang="ar-SA" altLang="en-US" sz="1300" b="1" dirty="0">
+              <a:rPr lang="ar-SA" altLang="en-US" sz="1200" b="1" dirty="0">
                 <a:solidFill>
                   <a:srgbClr val="0B3C5D"/>
                 </a:solidFill>
@@ -2536,9 +3332,9 @@
                 <a:ea typeface="Arial" pitchFamily="34" charset="-122"/>
                 <a:cs typeface="Arial" pitchFamily="34" charset="-120"/>
               </a:rPr>
-              <a:t>لماذا يرتفع الفاقد المائي؟</a:t>
-            </a:r>
-            <a:endParaRPr lang="ar-SA" sz="1300" dirty="0"/>
+              <a:t>لماذا يستمر الفاقد الفني رغم وجود أنظمة الكشف ومتابعة NRW؟</a:t>
+            </a:r>
+            <a:endParaRPr lang="ar-SA" sz="1200" dirty="0"/>
           </a:p>
         </p:txBody>
       </p:sp>
@@ -2551,7 +3347,7 @@
         <p:spPr>
           <a:xfrm>
             <a:off x="731520" y="1645920"/>
-            <a:ext cx="6565392" cy="658368"/>
+            <a:ext cx="6108192" cy="658368"/>
           </a:xfrm>
           <a:prstGeom prst="rect">
             <a:avLst/>
@@ -2567,7 +3363,7 @@
               <a:buNone/>
             </a:pPr>
             <a:r>
-              <a:rPr lang="ar-SA" altLang="en-US" sz="1200" dirty="0">
+              <a:rPr lang="ar-SA" altLang="en-US" sz="1150" dirty="0">
                 <a:solidFill>
                   <a:srgbClr val="1F2933"/>
                 </a:solidFill>
@@ -2575,9 +3371,9 @@
                 <a:ea typeface="Arial" pitchFamily="34" charset="-122"/>
                 <a:cs typeface="Arial" pitchFamily="34" charset="-120"/>
               </a:rPr>
-              <a:t>بسبب تسربات فنية مستمرة في الشبكة والمنشآت الداخلية لا تُعالج في وقتها.</a:t>
-            </a:r>
-            <a:endParaRPr lang="ar-SA" sz="1200" dirty="0"/>
+              <a:t>لأن جزءاً من الأحداث المرشحة يتأخر التحقق منه فتتأخر المعالجة، وجزءاً آخر يُصرف عليه جهد ميداني دون تسرب فعلي.</a:t>
+            </a:r>
+            <a:endParaRPr lang="ar-SA" sz="1150" dirty="0"/>
           </a:p>
         </p:txBody>
       </p:sp>
@@ -2680,8 +3476,8 @@
         </p:nvSpPr>
         <p:spPr>
           <a:xfrm>
-            <a:off x="7479792" y="2596896"/>
-            <a:ext cx="3291840" cy="621792"/>
+            <a:off x="7022592" y="2578608"/>
+            <a:ext cx="3749040" cy="658368"/>
           </a:xfrm>
           <a:prstGeom prst="rect">
             <a:avLst/>
@@ -2697,7 +3493,7 @@
               <a:buNone/>
             </a:pPr>
             <a:r>
-              <a:rPr lang="ar-SA" altLang="en-US" sz="1300" b="1" dirty="0">
+              <a:rPr lang="ar-SA" altLang="en-US" sz="1200" b="1" dirty="0">
                 <a:solidFill>
                   <a:srgbClr val="0B3C5D"/>
                 </a:solidFill>
@@ -2705,9 +3501,9 @@
                 <a:ea typeface="Arial" pitchFamily="34" charset="-122"/>
                 <a:cs typeface="Arial" pitchFamily="34" charset="-120"/>
               </a:rPr>
-              <a:t>لماذا لا تُكتشف التسربات مبكراً؟</a:t>
-            </a:r>
-            <a:endParaRPr lang="ar-SA" sz="1300" dirty="0"/>
+              <a:t>لماذا يتأخر التحقق أو يُصرف الجهد بلا نتيجة؟</a:t>
+            </a:r>
+            <a:endParaRPr lang="ar-SA" sz="1200" dirty="0"/>
           </a:p>
         </p:txBody>
       </p:sp>
@@ -2720,7 +3516,7 @@
         <p:spPr>
           <a:xfrm>
             <a:off x="731520" y="2578608"/>
-            <a:ext cx="6565392" cy="658368"/>
+            <a:ext cx="6108192" cy="658368"/>
           </a:xfrm>
           <a:prstGeom prst="rect">
             <a:avLst/>
@@ -2736,7 +3532,7 @@
               <a:buNone/>
             </a:pPr>
             <a:r>
-              <a:rPr lang="ar-SA" altLang="en-US" sz="1200" dirty="0">
+              <a:rPr lang="ar-SA" altLang="en-US" sz="1150" dirty="0">
                 <a:solidFill>
                   <a:srgbClr val="1F2933"/>
                 </a:solidFill>
@@ -2744,9 +3540,9 @@
                 <a:ea typeface="Arial" pitchFamily="34" charset="-122"/>
                 <a:cs typeface="Arial" pitchFamily="34" charset="-120"/>
               </a:rPr>
-              <a:t>لأن أغلبها غير مرئي، ولا توجد مراقبة لحظية لكل مقطع من الشبكة؛ الاعتماد على البلاغات والمظهر السطحي.</a:t>
-            </a:r>
-            <a:endParaRPr lang="ar-SA" sz="1200" dirty="0"/>
+              <a:t>لأن الحدث يصل إلى الفريق كإنذار أو انحراف رقمي، دون درجة ثقة ودون دليل يفسر سببه.</a:t>
+            </a:r>
+            <a:endParaRPr lang="ar-SA" sz="1150" dirty="0"/>
           </a:p>
         </p:txBody>
       </p:sp>
@@ -2849,8 +3645,8 @@
         </p:nvSpPr>
         <p:spPr>
           <a:xfrm>
-            <a:off x="7479792" y="3529584"/>
-            <a:ext cx="3291840" cy="621792"/>
+            <a:off x="7022592" y="3511296"/>
+            <a:ext cx="3749040" cy="658368"/>
           </a:xfrm>
           <a:prstGeom prst="rect">
             <a:avLst/>
@@ -2866,7 +3662,7 @@
               <a:buNone/>
             </a:pPr>
             <a:r>
-              <a:rPr lang="ar-SA" altLang="en-US" sz="1300" b="1" dirty="0">
+              <a:rPr lang="ar-SA" altLang="en-US" sz="1200" b="1" dirty="0">
                 <a:solidFill>
                   <a:srgbClr val="0B3C5D"/>
                 </a:solidFill>
@@ -2874,9 +3670,9 @@
                 <a:ea typeface="Arial" pitchFamily="34" charset="-122"/>
                 <a:cs typeface="Arial" pitchFamily="34" charset="-120"/>
               </a:rPr>
-              <a:t>لماذا لا توجد مراقبة لحظية موثوقة؟</a:t>
-            </a:r>
-            <a:endParaRPr lang="ar-SA" sz="1300" dirty="0"/>
+              <a:t>لماذا لا توجد درجة ثقة مرفقة بالحدث؟</a:t>
+            </a:r>
+            <a:endParaRPr lang="ar-SA" sz="1200" dirty="0"/>
           </a:p>
         </p:txBody>
       </p:sp>
@@ -2889,7 +3685,7 @@
         <p:spPr>
           <a:xfrm>
             <a:off x="731520" y="3511296"/>
-            <a:ext cx="6565392" cy="658368"/>
+            <a:ext cx="6108192" cy="658368"/>
           </a:xfrm>
           <a:prstGeom prst="rect">
             <a:avLst/>
@@ -2905,7 +3701,7 @@
               <a:buNone/>
             </a:pPr>
             <a:r>
-              <a:rPr lang="ar-SA" altLang="en-US" sz="1200" dirty="0">
+              <a:rPr lang="ar-SA" altLang="en-US" sz="1150" dirty="0">
                 <a:solidFill>
                   <a:srgbClr val="1F2933"/>
                 </a:solidFill>
@@ -2913,9 +3709,9 @@
                 <a:ea typeface="Arial" pitchFamily="34" charset="-122"/>
                 <a:cs typeface="Arial" pitchFamily="34" charset="-120"/>
               </a:rPr>
-              <a:t>لأن الأنظمة الحالية تجمع البيانات دون تحليل لحظي، وتولد إنذارات كاذبة كثيرة تفقد الفرق الثقة بها.</a:t>
-            </a:r>
-            <a:endParaRPr lang="ar-SA" sz="1200" dirty="0"/>
+              <a:t>لأن الأنظمة القائمة تقيس وتعرض (تدفق، ضغط، نسب فقد) لكنها لا تفسّر: لا تربط الحدث بحالة الحساس نفسه ولا بسلوك جيرانه.</a:t>
+            </a:r>
+            <a:endParaRPr lang="ar-SA" sz="1150" dirty="0"/>
           </a:p>
         </p:txBody>
       </p:sp>
@@ -3018,8 +3814,8 @@
         </p:nvSpPr>
         <p:spPr>
           <a:xfrm>
-            <a:off x="7479792" y="4462272"/>
-            <a:ext cx="3291840" cy="621792"/>
+            <a:off x="7022592" y="4443984"/>
+            <a:ext cx="3749040" cy="658368"/>
           </a:xfrm>
           <a:prstGeom prst="rect">
             <a:avLst/>
@@ -3035,7 +3831,7 @@
               <a:buNone/>
             </a:pPr>
             <a:r>
-              <a:rPr lang="ar-SA" altLang="en-US" sz="1300" b="1" dirty="0">
+              <a:rPr lang="ar-SA" altLang="en-US" sz="1200" b="1" dirty="0">
                 <a:solidFill>
                   <a:srgbClr val="0B3C5D"/>
                 </a:solidFill>
@@ -3043,9 +3839,9 @@
                 <a:ea typeface="Arial" pitchFamily="34" charset="-122"/>
                 <a:cs typeface="Arial" pitchFamily="34" charset="-120"/>
               </a:rPr>
-              <a:t>لماذا كثرة الإنذارات الكاذبة؟</a:t>
-            </a:r>
-            <a:endParaRPr lang="ar-SA" sz="1300" dirty="0"/>
+              <a:t>لماذا لا يتم هذا الربط؟</a:t>
+            </a:r>
+            <a:endParaRPr lang="ar-SA" sz="1200" dirty="0"/>
           </a:p>
         </p:txBody>
       </p:sp>
@@ -3058,7 +3854,7 @@
         <p:spPr>
           <a:xfrm>
             <a:off x="731520" y="4443984"/>
-            <a:ext cx="6565392" cy="658368"/>
+            <a:ext cx="6108192" cy="658368"/>
           </a:xfrm>
           <a:prstGeom prst="rect">
             <a:avLst/>
@@ -3074,7 +3870,7 @@
               <a:buNone/>
             </a:pPr>
             <a:r>
-              <a:rPr lang="ar-SA" altLang="en-US" sz="1200" dirty="0">
+              <a:rPr lang="ar-SA" altLang="en-US" sz="1150" dirty="0">
                 <a:solidFill>
                   <a:srgbClr val="1F2933"/>
                 </a:solidFill>
@@ -3082,9 +3878,9 @@
                 <a:ea typeface="Arial" pitchFamily="34" charset="-122"/>
                 <a:cs typeface="Arial" pitchFamily="34" charset="-120"/>
               </a:rPr>
-              <a:t>لغياب "طبقة ثقة" تتحقق من مصداقية القراءة وتميز بين التسرب الفعلي، عطل الحساس، أو التلاعب السيبراني.</a:t>
-            </a:r>
-            <a:endParaRPr lang="ar-SA" sz="1200" dirty="0"/>
+              <a:t>لأنه يتطلب نموذجاً لانتشار أثر الانكسار محلياً حول موقعه عبر أقرب الحساسات، ونموذجاً لصحة الحساس — وكلاهما يُبنى على سلوك الشبكة الفعلي.</a:t>
+            </a:r>
+            <a:endParaRPr lang="ar-SA" sz="1150" dirty="0"/>
           </a:p>
         </p:txBody>
       </p:sp>
@@ -3187,8 +3983,8 @@
         </p:nvSpPr>
         <p:spPr>
           <a:xfrm>
-            <a:off x="7479792" y="5394960"/>
-            <a:ext cx="3291840" cy="621792"/>
+            <a:off x="7022592" y="5376672"/>
+            <a:ext cx="3749040" cy="658368"/>
           </a:xfrm>
           <a:prstGeom prst="rect">
             <a:avLst/>
@@ -3204,7 +4000,7 @@
               <a:buNone/>
             </a:pPr>
             <a:r>
-              <a:rPr lang="ar-SA" altLang="en-US" sz="1300" b="1" dirty="0">
+              <a:rPr lang="ar-SA" altLang="en-US" sz="1200" b="1" dirty="0">
                 <a:solidFill>
                   <a:srgbClr val="0B3C5D"/>
                 </a:solidFill>
@@ -3212,9 +4008,9 @@
                 <a:ea typeface="Arial" pitchFamily="34" charset="-122"/>
                 <a:cs typeface="Arial" pitchFamily="34" charset="-120"/>
               </a:rPr>
-              <a:t>لماذا تغيب طبقة الثقة؟</a:t>
-            </a:r>
-            <a:endParaRPr lang="ar-SA" sz="1300" dirty="0"/>
+              <a:t>لماذا لم يُبنَ هذا النموذج؟</a:t>
+            </a:r>
+            <a:endParaRPr lang="ar-SA" sz="1200" dirty="0"/>
           </a:p>
         </p:txBody>
       </p:sp>
@@ -3227,7 +4023,7 @@
         <p:spPr>
           <a:xfrm>
             <a:off x="731520" y="5376672"/>
-            <a:ext cx="6565392" cy="658368"/>
+            <a:ext cx="6108192" cy="658368"/>
           </a:xfrm>
           <a:prstGeom prst="rect">
             <a:avLst/>
@@ -3243,7 +4039,7 @@
               <a:buNone/>
             </a:pPr>
             <a:r>
-              <a:rPr lang="ar-SA" altLang="en-US" sz="1200" dirty="0">
+              <a:rPr lang="ar-SA" altLang="en-US" sz="1150" dirty="0">
                 <a:solidFill>
                   <a:srgbClr val="1F2933"/>
                 </a:solidFill>
@@ -3251,9 +4047,9 @@
                 <a:ea typeface="Arial" pitchFamily="34" charset="-122"/>
                 <a:cs typeface="Arial" pitchFamily="34" charset="-120"/>
               </a:rPr>
-              <a:t>لعدم وجود حل محلي مدمج يجمع التوأم الرقمي والذكاء الاصطناعي وأمن أنظمة التحكم في منصة واحدة تتكامل مع الأنظمة القائمة بوضع قراءة فقط.</a:t>
-            </a:r>
-            <a:endParaRPr lang="ar-SA" sz="1200" dirty="0"/>
+              <a:t>لغياب طبقة تحليلية مستقلة تُعاير على البيانات التاريخية الحقيقية للمشغّل، وتتكامل معه بوضع قراءة فقط دون تكرار أنظمته.</a:t>
+            </a:r>
+            <a:endParaRPr lang="ar-SA" sz="1150" dirty="0"/>
           </a:p>
         </p:txBody>
       </p:sp>
@@ -3290,7 +4086,7 @@
                 <a:ea typeface="Arial" pitchFamily="34" charset="-122"/>
                 <a:cs typeface="Arial" pitchFamily="34" charset="-120"/>
               </a:rPr>
-              <a:t>السبب الجذري: غياب طبقة ثقة تحليلية محلية تتكامل مع الأنظمة القائمة دون تعديلها</a:t>
+              <a:t>السبب الجذري: غياب طبقة تحقق تحوّل الحدث إلى قرار مسنود بدليل ودرجة ثقة، مُعايَرة على بيانات الشبكة الحقيقية</a:t>
             </a:r>
             <a:endParaRPr lang="ar-SA" sz="1200" dirty="0"/>
           </a:p>
@@ -3329,7 +4125,7 @@
                 <a:ea typeface="Arial" pitchFamily="34" charset="-122"/>
                 <a:cs typeface="Arial" pitchFamily="34" charset="-120"/>
               </a:rPr>
-              <a:t>نبض NABD  |  حل كشف الفاقد والتسربات في شبكات المياه</a:t>
+              <a:t>نبض NABD  |  طبقة التحقق من أحداث التسرب في شبكات المياه</a:t>
             </a:r>
             <a:endParaRPr lang="ar-SA" sz="900" dirty="0"/>
           </a:p>
@@ -3368,7 +4164,7 @@
                 <a:ea typeface="Arial" pitchFamily="34" charset="-122"/>
                 <a:cs typeface="Arial" pitchFamily="34" charset="-120"/>
               </a:rPr>
-              <a:t>3</a:t>
+              <a:t>4</a:t>
             </a:r>
             <a:endParaRPr lang="ar-SA" sz="900" dirty="0"/>
           </a:p>
@@ -3382,9 +4178,9 @@
 </p:sld>
 </file>
 
-<file path=ppt/slides/slide4.xml><?xml version="1.0" encoding="utf-8"?>
+<file path=ppt/slides/slide5.xml><?xml version="1.0" encoding="utf-8"?>
 <p:sld xmlns:a="http://schemas.openxmlformats.org/drawingml/2006/main" xmlns:r="http://schemas.openxmlformats.org/officeDocument/2006/relationships" xmlns:p="http://schemas.openxmlformats.org/presentationml/2006/main">
-  <p:cSld name="Slide 4">
+  <p:cSld name="Slide 5">
     <p:bg>
       <p:bgPr>
         <a:solidFill>
@@ -3527,7 +4323,7 @@
         <p:spPr>
           <a:xfrm>
             <a:off x="9171432" y="1737360"/>
-            <a:ext cx="2286000" cy="731520"/>
+            <a:ext cx="2286000" cy="685800"/>
           </a:xfrm>
           <a:prstGeom prst="rect">
             <a:avLst/>
@@ -3543,7 +4339,7 @@
               <a:buNone/>
             </a:pPr>
             <a:r>
-              <a:rPr lang="ar-SA" altLang="en-US" sz="3000" b="1" dirty="0">
+              <a:rPr lang="ar-SA" altLang="en-US" sz="1900" b="1" dirty="0">
                 <a:solidFill>
                   <a:srgbClr val="1C7293"/>
                 </a:solidFill>
@@ -3551,9 +4347,9 @@
                 <a:ea typeface="Arial" pitchFamily="34" charset="-122"/>
                 <a:cs typeface="Arial" pitchFamily="34" charset="-120"/>
               </a:rPr>
-              <a:t>ملايين م³</a:t>
-            </a:r>
-            <a:endParaRPr lang="ar-SA" sz="3000" dirty="0"/>
+              <a:t>زيارات بلا نتيجة</a:t>
+            </a:r>
+            <a:endParaRPr lang="ar-SA" sz="1900" dirty="0"/>
           </a:p>
         </p:txBody>
       </p:sp>
@@ -3565,8 +4361,8 @@
         </p:nvSpPr>
         <p:spPr>
           <a:xfrm>
-            <a:off x="9171432" y="2468880"/>
-            <a:ext cx="2286000" cy="914400"/>
+            <a:off x="9171432" y="2423160"/>
+            <a:ext cx="2286000" cy="960120"/>
           </a:xfrm>
           <a:prstGeom prst="rect">
             <a:avLst/>
@@ -3590,7 +4386,7 @@
                 <a:ea typeface="Arial" pitchFamily="34" charset="-122"/>
                 <a:cs typeface="Arial" pitchFamily="34" charset="-120"/>
               </a:rPr>
-              <a:t>هدر سنوي؛ كل 1% خفض في الفاقد يعادل ملايين الأمتار المكعبة</a:t>
+              <a:t>كل حدث غير مؤكد يُرسل له فريق = ساعات عمل ومركبات وكلفة تشغيل بلا مقابل</a:t>
             </a:r>
             <a:endParaRPr lang="ar-SA" sz="1100" dirty="0"/>
           </a:p>
@@ -3639,7 +4435,7 @@
         <p:spPr>
           <a:xfrm>
             <a:off x="6291072" y="1737360"/>
-            <a:ext cx="2286000" cy="731520"/>
+            <a:ext cx="2286000" cy="685800"/>
           </a:xfrm>
           <a:prstGeom prst="rect">
             <a:avLst/>
@@ -3655,7 +4451,7 @@
               <a:buNone/>
             </a:pPr>
             <a:r>
-              <a:rPr lang="ar-SA" altLang="en-US" sz="3000" b="1" dirty="0">
+              <a:rPr lang="ar-SA" altLang="en-US" sz="1900" b="1" dirty="0">
                 <a:solidFill>
                   <a:srgbClr val="1C7293"/>
                 </a:solidFill>
@@ -3663,9 +4459,9 @@
                 <a:ea typeface="Arial" pitchFamily="34" charset="-122"/>
                 <a:cs typeface="Arial" pitchFamily="34" charset="-120"/>
               </a:rPr>
-              <a:t>+90%</a:t>
-            </a:r>
-            <a:endParaRPr lang="ar-SA" sz="3000" dirty="0"/>
+              <a:t>زمن حتى القرار</a:t>
+            </a:r>
+            <a:endParaRPr lang="ar-SA" sz="1900" dirty="0"/>
           </a:p>
         </p:txBody>
       </p:sp>
@@ -3677,8 +4473,8 @@
         </p:nvSpPr>
         <p:spPr>
           <a:xfrm>
-            <a:off x="6291072" y="2468880"/>
-            <a:ext cx="2286000" cy="914400"/>
+            <a:off x="6291072" y="2423160"/>
+            <a:ext cx="2286000" cy="960120"/>
           </a:xfrm>
           <a:prstGeom prst="rect">
             <a:avLst/>
@@ -3702,7 +4498,7 @@
                 <a:ea typeface="Arial" pitchFamily="34" charset="-122"/>
                 <a:cs typeface="Arial" pitchFamily="34" charset="-120"/>
               </a:rPr>
-              <a:t>من الفواتير المرتفعة سببها تسربات فنية، مما يولد شكاوى متكررة</a:t>
+              <a:t>الانكسار الحقيقي ينتظر في طابور مزدحم بأحداث لم يُتحقق منها</a:t>
             </a:r>
             <a:endParaRPr lang="ar-SA" sz="1100" dirty="0"/>
           </a:p>
@@ -3751,7 +4547,7 @@
         <p:spPr>
           <a:xfrm>
             <a:off x="3410712" y="1737360"/>
-            <a:ext cx="2286000" cy="731520"/>
+            <a:ext cx="2286000" cy="685800"/>
           </a:xfrm>
           <a:prstGeom prst="rect">
             <a:avLst/>
@@ -3767,7 +4563,7 @@
               <a:buNone/>
             </a:pPr>
             <a:r>
-              <a:rPr lang="ar-SA" altLang="en-US" sz="3000" b="1" dirty="0">
+              <a:rPr lang="ar-SA" altLang="en-US" sz="1900" b="1" dirty="0">
                 <a:solidFill>
                   <a:srgbClr val="1C7293"/>
                 </a:solidFill>
@@ -3775,9 +4571,9 @@
                 <a:ea typeface="Arial" pitchFamily="34" charset="-122"/>
                 <a:cs typeface="Arial" pitchFamily="34" charset="-120"/>
               </a:rPr>
-              <a:t>134,000 كم</a:t>
-            </a:r>
-            <a:endParaRPr lang="ar-SA" sz="3000" dirty="0"/>
+              <a:t>قراءات غير سليمة</a:t>
+            </a:r>
+            <a:endParaRPr lang="ar-SA" sz="1900" dirty="0"/>
           </a:p>
         </p:txBody>
       </p:sp>
@@ -3789,8 +4585,8 @@
         </p:nvSpPr>
         <p:spPr>
           <a:xfrm>
-            <a:off x="3410712" y="2468880"/>
-            <a:ext cx="2286000" cy="914400"/>
+            <a:off x="3410712" y="2423160"/>
+            <a:ext cx="2286000" cy="960120"/>
           </a:xfrm>
           <a:prstGeom prst="rect">
             <a:avLst/>
@@ -3814,7 +4610,7 @@
                 <a:ea typeface="Arial" pitchFamily="34" charset="-122"/>
                 <a:cs typeface="Arial" pitchFamily="34" charset="-120"/>
               </a:rPr>
-              <a:t>طول الشبكة الوطنية المعرضة لتسربات غير مرئية</a:t>
+              <a:t>عطل الحساس غير المكتشف يلوّث مؤشرات الفاقد ويقود إلى قرارات مبنية على رقم خاطئ</a:t>
             </a:r>
             <a:endParaRPr lang="ar-SA" sz="1100" dirty="0"/>
           </a:p>
@@ -3863,7 +4659,7 @@
         <p:spPr>
           <a:xfrm>
             <a:off x="530352" y="1737360"/>
-            <a:ext cx="2286000" cy="731520"/>
+            <a:ext cx="2286000" cy="685800"/>
           </a:xfrm>
           <a:prstGeom prst="rect">
             <a:avLst/>
@@ -3879,7 +4675,7 @@
               <a:buNone/>
             </a:pPr>
             <a:r>
-              <a:rPr lang="ar-SA" altLang="en-US" sz="3000" b="1" dirty="0">
+              <a:rPr lang="ar-SA" altLang="en-US" sz="1900" b="1" dirty="0">
                 <a:solidFill>
                   <a:srgbClr val="1C7293"/>
                 </a:solidFill>
@@ -3887,9 +4683,9 @@
                 <a:ea typeface="Arial" pitchFamily="34" charset="-122"/>
                 <a:cs typeface="Arial" pitchFamily="34" charset="-120"/>
               </a:rPr>
-              <a:t>24/7</a:t>
-            </a:r>
-            <a:endParaRPr lang="ar-SA" sz="3000" dirty="0"/>
+              <a:t>ثقة الفرق</a:t>
+            </a:r>
+            <a:endParaRPr lang="ar-SA" sz="1900" dirty="0"/>
           </a:p>
         </p:txBody>
       </p:sp>
@@ -3901,8 +4697,8 @@
         </p:nvSpPr>
         <p:spPr>
           <a:xfrm>
-            <a:off x="530352" y="2468880"/>
-            <a:ext cx="2286000" cy="914400"/>
+            <a:off x="530352" y="2423160"/>
+            <a:ext cx="2286000" cy="960120"/>
           </a:xfrm>
           <a:prstGeom prst="rect">
             <a:avLst/>
@@ -3926,7 +4722,7 @@
                 <a:ea typeface="Arial" pitchFamily="34" charset="-122"/>
                 <a:cs typeface="Arial" pitchFamily="34" charset="-120"/>
               </a:rPr>
-              <a:t>تعرّض أنظمة التحكم (OT) لمخاطر التلاعب دون تحقق من القراءات</a:t>
+              <a:t>تكرار الإنذارات غير المؤكدة يدفع الفرق لتجاهلها — فيضيع الإنذار الصحيح بينها</a:t>
             </a:r>
             <a:endParaRPr lang="ar-SA" sz="1100" dirty="0"/>
           </a:p>
@@ -3965,7 +4761,7 @@
                 <a:ea typeface="Arial" pitchFamily="34" charset="-122"/>
                 <a:cs typeface="Arial" pitchFamily="34" charset="-120"/>
               </a:rPr>
-              <a:t>تكاليف إضافية: بحث ميداني عشوائي، صيانة طارئة بدل تنبؤية، طاقة ضخ غير ضرورية، وأثر على سمعة الجهة المشغلة.</a:t>
+              <a:t>تُقاس هذه المحاور كمياً من بيانات المشغّل الحقيقية (أوامر العمل السابقة ونتائجها الميدانية) — ولا تُقدَّر بأرقام افتراضية قبل الحصول عليها.</a:t>
             </a:r>
             <a:endParaRPr lang="ar-SA" sz="1200" dirty="0"/>
           </a:p>
@@ -4065,7 +4861,7 @@
               <a:buNone/>
             </a:pPr>
             <a:r>
-              <a:rPr lang="ar-SA" altLang="en-US" sz="1400" dirty="0">
+              <a:rPr lang="ar-SA" altLang="en-US" sz="1350" dirty="0">
                 <a:solidFill>
                   <a:srgbClr val="FFFFFF"/>
                 </a:solidFill>
@@ -4082,7 +4878,7 @@
               <a:buNone/>
             </a:pPr>
             <a:r>
-              <a:rPr lang="ar-SA" altLang="en-US" sz="1400" b="1" dirty="0">
+              <a:rPr lang="ar-SA" altLang="en-US" sz="1350" b="1" dirty="0">
                 <a:solidFill>
                   <a:srgbClr val="3FB8AF"/>
                 </a:solidFill>
@@ -4090,7 +4886,7 @@
                 <a:ea typeface="Arial" pitchFamily="34" charset="-122"/>
                 <a:cs typeface="Arial" pitchFamily="34" charset="-120"/>
               </a:rPr>
-              <a:t>مشغلو شبكات المياه والمشتركون</a:t>
+              <a:t>فرق تشغيل وصيانة شبكات المياه</a:t>
             </a:r>
             <a:pPr algn="r" indent="0" marL="0">
               <a:lnSpc>
@@ -4099,7 +4895,7 @@
               <a:buNone/>
             </a:pPr>
             <a:r>
-              <a:rPr lang="ar-SA" altLang="en-US" sz="1400" dirty="0">
+              <a:rPr lang="ar-SA" altLang="en-US" sz="1350" dirty="0">
                 <a:solidFill>
                   <a:srgbClr val="FFFFFF"/>
                 </a:solidFill>
@@ -4116,7 +4912,7 @@
               <a:buNone/>
             </a:pPr>
             <a:r>
-              <a:rPr lang="ar-SA" altLang="en-US" sz="1400" b="1" dirty="0">
+              <a:rPr lang="ar-SA" altLang="en-US" sz="1350" b="1" dirty="0">
                 <a:solidFill>
                   <a:srgbClr val="3FB8AF"/>
                 </a:solidFill>
@@ -4124,7 +4920,7 @@
                 <a:ea typeface="Arial" pitchFamily="34" charset="-122"/>
                 <a:cs typeface="Arial" pitchFamily="34" charset="-120"/>
               </a:rPr>
-              <a:t>ارتفاع الفاقد غير المحاسب والتسربات غير المرئية التي تُكتشف متأخرة</a:t>
+              <a:t>وصول أحداث التسرب المرشحة إليهم دون درجة ثقة أو دليل يميز الانكسار المؤكد عن عطل الحساس عن التغير الطبيعي في الطلب</a:t>
             </a:r>
             <a:pPr algn="r" indent="0" marL="0">
               <a:lnSpc>
@@ -4133,7 +4929,7 @@
               <a:buNone/>
             </a:pPr>
             <a:r>
-              <a:rPr lang="ar-SA" altLang="en-US" sz="1400" dirty="0">
+              <a:rPr lang="ar-SA" altLang="en-US" sz="1350" dirty="0">
                 <a:solidFill>
                   <a:srgbClr val="FFFFFF"/>
                 </a:solidFill>
@@ -4150,7 +4946,7 @@
               <a:buNone/>
             </a:pPr>
             <a:r>
-              <a:rPr lang="ar-SA" altLang="en-US" sz="1400" b="1" dirty="0">
+              <a:rPr lang="ar-SA" altLang="en-US" sz="1350" b="1" dirty="0">
                 <a:solidFill>
                   <a:srgbClr val="3FB8AF"/>
                 </a:solidFill>
@@ -4158,7 +4954,7 @@
                 <a:ea typeface="Arial" pitchFamily="34" charset="-122"/>
                 <a:cs typeface="Arial" pitchFamily="34" charset="-120"/>
               </a:rPr>
-              <a:t>مراحل نقل وتوزيع المياه وداخل المنشآت على مدار الساعة</a:t>
+              <a:t>اللحظة الفاصلة بين رصد الحدث وإصدار أمر العمل</a:t>
             </a:r>
             <a:pPr algn="r" indent="0" marL="0">
               <a:lnSpc>
@@ -4167,7 +4963,7 @@
               <a:buNone/>
             </a:pPr>
             <a:r>
-              <a:rPr lang="ar-SA" altLang="en-US" sz="1400" dirty="0">
+              <a:rPr lang="ar-SA" altLang="en-US" sz="1350" dirty="0">
                 <a:solidFill>
                   <a:srgbClr val="FFFFFF"/>
                 </a:solidFill>
@@ -4184,7 +4980,7 @@
               <a:buNone/>
             </a:pPr>
             <a:r>
-              <a:rPr lang="ar-SA" altLang="en-US" sz="1400" b="1" dirty="0">
+              <a:rPr lang="ar-SA" altLang="en-US" sz="1350" b="1" dirty="0">
                 <a:solidFill>
                   <a:srgbClr val="3FB8AF"/>
                 </a:solidFill>
@@ -4192,7 +4988,7 @@
                 <a:ea typeface="Arial" pitchFamily="34" charset="-122"/>
                 <a:cs typeface="Arial" pitchFamily="34" charset="-120"/>
               </a:rPr>
-              <a:t>غياب نظام رصد لحظي موثوق يميز بين التسرب الفعلي وأعطال الحساسات والتلاعب السيبراني</a:t>
+              <a:t>غياب طبقة تحقق تقرأ التوقيع الهيدروليكي المحلي حول موقع الحدث وحالة الحساس، مُعايَرة على بيانات الشبكة الحقيقية</a:t>
             </a:r>
             <a:pPr algn="r" indent="0" marL="0">
               <a:lnSpc>
@@ -4201,7 +4997,7 @@
               <a:buNone/>
             </a:pPr>
             <a:r>
-              <a:rPr lang="ar-SA" altLang="en-US" sz="1400" dirty="0">
+              <a:rPr lang="ar-SA" altLang="en-US" sz="1350" dirty="0">
                 <a:solidFill>
                   <a:srgbClr val="FFFFFF"/>
                 </a:solidFill>
@@ -4218,7 +5014,7 @@
               <a:buNone/>
             </a:pPr>
             <a:r>
-              <a:rPr lang="ar-SA" altLang="en-US" sz="1400" b="1" dirty="0">
+              <a:rPr lang="ar-SA" altLang="en-US" sz="1350" b="1" dirty="0">
                 <a:solidFill>
                   <a:srgbClr val="3FB8AF"/>
                 </a:solidFill>
@@ -4226,9 +5022,9 @@
                 <a:ea typeface="Arial" pitchFamily="34" charset="-122"/>
                 <a:cs typeface="Arial" pitchFamily="34" charset="-120"/>
               </a:rPr>
-              <a:t>هدر ملايين الأمتار المكعبة سنوياً، وارتفاع تكاليف التشغيل والصيانة، وفواتير مرتفعة وشكاوى متكررة، وتعريض البنية التحتية الحرجة لمخاطر أمنية.</a:t>
-            </a:r>
-            <a:endParaRPr lang="ar-SA" sz="1400" dirty="0"/>
+              <a:t>زيارات ميدانية بلا نتيجة، وتأخر معالجة الانكسارات الحقيقية، وتلوّث مؤشرات الفاقد بقراءات غير سليمة، وتآكل ثقة الفرق بالإنذارات.</a:t>
+            </a:r>
+            <a:endParaRPr lang="ar-SA" sz="1350" dirty="0"/>
           </a:p>
         </p:txBody>
       </p:sp>
@@ -4265,7 +5061,7 @@
                 <a:ea typeface="Arial" pitchFamily="34" charset="-122"/>
                 <a:cs typeface="Arial" pitchFamily="34" charset="-120"/>
               </a:rPr>
-              <a:t>نبض NABD  |  حل كشف الفاقد والتسربات في شبكات المياه</a:t>
+              <a:t>نبض NABD  |  طبقة التحقق من أحداث التسرب في شبكات المياه</a:t>
             </a:r>
             <a:endParaRPr lang="ar-SA" sz="900" dirty="0"/>
           </a:p>
@@ -4304,7 +5100,7 @@
                 <a:ea typeface="Arial" pitchFamily="34" charset="-122"/>
                 <a:cs typeface="Arial" pitchFamily="34" charset="-120"/>
               </a:rPr>
-              <a:t>4</a:t>
+              <a:t>5</a:t>
             </a:r>
             <a:endParaRPr lang="ar-SA" sz="900" dirty="0"/>
           </a:p>
@@ -4318,9 +5114,9 @@
 </p:sld>
 </file>
 
-<file path=ppt/slides/slide5.xml><?xml version="1.0" encoding="utf-8"?>
+<file path=ppt/slides/slide6.xml><?xml version="1.0" encoding="utf-8"?>
 <p:sld xmlns:a="http://schemas.openxmlformats.org/drawingml/2006/main" xmlns:r="http://schemas.openxmlformats.org/officeDocument/2006/relationships" xmlns:p="http://schemas.openxmlformats.org/presentationml/2006/main">
-  <p:cSld name="Slide 5">
+  <p:cSld name="Slide 6">
     <p:bg>
       <p:bgPr>
         <a:solidFill>
@@ -4414,7 +5210,7 @@
                 <a:ea typeface="Arial" pitchFamily="34" charset="-122"/>
                 <a:cs typeface="Arial" pitchFamily="34" charset="-120"/>
               </a:rPr>
-              <a:t>الشريحة المستهدفة: مدير تشغيل وصيانة شبكة مياه، ومدير الأمن السيبراني للأنظمة التشغيلية (OT) لدى الجهة المشغلة</a:t>
+              <a:t>الشريحة المستهدفة: مدير/مشرف تشغيل وصيانة شبكة توزيع لدى مشغّل يملك أصلاً أنظمة كشف ومتابعة فاقد</a:t>
             </a:r>
             <a:endParaRPr lang="ar-SA" sz="1400" dirty="0"/>
           </a:p>
@@ -4530,7 +5326,7 @@
                 <a:ea typeface="Arial" pitchFamily="34" charset="-122"/>
                 <a:cs typeface="Arial" pitchFamily="34" charset="-120"/>
               </a:rPr>
-              <a:t>"نغرق في بلاغات التسرب والشكاوى المتكررة"</a:t>
+              <a:t>"عندي أنظمة كشف ومنصات فاقد — ما أحتاج نظاماً جديداً يعرض لي نفس الشيء"</a:t>
             </a:r>
             <a:endParaRPr lang="ar-SA" sz="1100" dirty="0"/>
           </a:p>
@@ -4551,7 +5347,7 @@
                 <a:ea typeface="Arial" pitchFamily="34" charset="-122"/>
                 <a:cs typeface="Arial" pitchFamily="34" charset="-120"/>
               </a:rPr>
-              <a:t>"كيف نميز بين تسرب حقيقي وعطل في الحساس؟"</a:t>
+              <a:t>"كيف أعرف أن هذا الحدث انكسار فعلي وليس عطلاً في الحساس؟"</a:t>
             </a:r>
             <a:endParaRPr lang="ar-SA" sz="1100" dirty="0"/>
           </a:p>
@@ -4572,7 +5368,7 @@
                 <a:ea typeface="Arial" pitchFamily="34" charset="-122"/>
                 <a:cs typeface="Arial" pitchFamily="34" charset="-120"/>
               </a:rPr>
-              <a:t>"نريد حلاً لا يلمس أنظمتنا التشغيلية ولا يوقفها"</a:t>
+              <a:t>"لا أرسل فريقاً بناءً على رقم لا أعرف من أين جاء"</a:t>
             </a:r>
             <a:endParaRPr lang="ar-SA" sz="1100" dirty="0"/>
           </a:p>
@@ -4688,7 +5484,7 @@
                 <a:ea typeface="Arial" pitchFamily="34" charset="-122"/>
                 <a:cs typeface="Arial" pitchFamily="34" charset="-120"/>
               </a:rPr>
-              <a:t>الأولويات: خفض NRW، خفض التكاليف، الامتثال لضوابط الهيئة الوطنية للأمن السيبراني (OTCC)</a:t>
+              <a:t>الأولويات: قرار أسرع وأدق، وخفض الزيارات بلا نتيجة</a:t>
             </a:r>
             <a:endParaRPr lang="ar-SA" sz="1100" dirty="0"/>
           </a:p>
@@ -4709,7 +5505,7 @@
                 <a:ea typeface="Arial" pitchFamily="34" charset="-122"/>
                 <a:cs typeface="Arial" pitchFamily="34" charset="-120"/>
               </a:rPr>
-              <a:t>المخاوف: اختراق أنظمة التحكم، استمرار الهدر، تضرر سمعة الجهة</a:t>
+              <a:t>المخاوف: نظام يزيد الإنذارات بدل أن يرتبها، أو يلمس بيئة التشغيل</a:t>
             </a:r>
             <a:endParaRPr lang="ar-SA" sz="1100" dirty="0"/>
           </a:p>
@@ -4730,7 +5526,7 @@
                 <a:ea typeface="Arial" pitchFamily="34" charset="-122"/>
                 <a:cs typeface="Arial" pitchFamily="34" charset="-120"/>
               </a:rPr>
-              <a:t>الطموح: شبكة ذكية آمنة قابلة للتوسع وطنياً</a:t>
+              <a:t>الطموح: كل حدث يصل ومعه سببه ودرجة ثقته، وقابل للتوسع</a:t>
             </a:r>
             <a:endParaRPr lang="ar-SA" sz="1100" dirty="0"/>
           </a:p>
@@ -4846,7 +5642,7 @@
                 <a:ea typeface="Arial" pitchFamily="34" charset="-122"/>
                 <a:cs typeface="Arial" pitchFamily="34" charset="-120"/>
               </a:rPr>
-              <a:t>يرسل فرقاً ميدانية تفاعلياً بعد البلاغ أو ظهور التسرب</a:t>
+              <a:t>يوازن يدوياً بين الأحداث المرشحة معتمداً على خبرة المناوب</a:t>
             </a:r>
             <a:endParaRPr lang="ar-SA" sz="1100" dirty="0"/>
           </a:p>
@@ -4867,7 +5663,7 @@
                 <a:ea typeface="Arial" pitchFamily="34" charset="-122"/>
                 <a:cs typeface="Arial" pitchFamily="34" charset="-120"/>
               </a:rPr>
-              <a:t>يعتمد الصيانة الطارئة بدل التنبؤية</a:t>
+              <a:t>يرسل فريقاً للتحقق الميداني حين يتعذر الحسم من المكتب</a:t>
             </a:r>
             <a:endParaRPr lang="ar-SA" sz="1100" dirty="0"/>
           </a:p>
@@ -4888,7 +5684,7 @@
                 <a:ea typeface="Arial" pitchFamily="34" charset="-122"/>
                 <a:cs typeface="Arial" pitchFamily="34" charset="-120"/>
               </a:rPr>
-              <a:t>يعالج شكاوى الفواتير يدوياً ويراجع التقارير الشهرية بأثر رجعي</a:t>
+              <a:t>يراجع أوامر العمل ونتائجها بأثر رجعي لاستخلاص الدروس</a:t>
             </a:r>
             <a:endParaRPr lang="ar-SA" sz="1100" dirty="0"/>
           </a:p>
@@ -5004,7 +5800,7 @@
                 <a:ea typeface="Arial" pitchFamily="34" charset="-122"/>
                 <a:cs typeface="Arial" pitchFamily="34" charset="-120"/>
               </a:rPr>
-              <a:t>إحباط من الإنذارات الكاذبة والإرسال غير المبرر للفرق</a:t>
+              <a:t>إحباط من الأحداث التي لا ينتج عنها تسرب بعد صرف الجهد</a:t>
             </a:r>
             <a:endParaRPr lang="ar-SA" sz="1100" dirty="0"/>
           </a:p>
@@ -5025,7 +5821,7 @@
                 <a:ea typeface="Arial" pitchFamily="34" charset="-122"/>
                 <a:cs typeface="Arial" pitchFamily="34" charset="-120"/>
               </a:rPr>
-              <a:t>قلق دائم من اختراق سيبراني أو انهيار أصل حيوي</a:t>
+              <a:t>قلق من انكسار حقيقي تأخر لأنه كان مدفوناً بين أحداث غير مؤكدة</a:t>
             </a:r>
             <a:endParaRPr lang="ar-SA" sz="1100" dirty="0"/>
           </a:p>
@@ -5046,7 +5842,7 @@
                 <a:ea typeface="Arial" pitchFamily="34" charset="-122"/>
                 <a:cs typeface="Arial" pitchFamily="34" charset="-120"/>
               </a:rPr>
-              <a:t>ضغط مستمر لتحقيق مؤشرات الأداء وخفض الهدر</a:t>
+              <a:t>ضغط مستمر لتحقيق مؤشرات الأداء بموارد ميدانية محدودة</a:t>
             </a:r>
             <a:endParaRPr lang="ar-SA" sz="1100" dirty="0"/>
           </a:p>
@@ -5162,7 +5958,7 @@
                 <a:ea typeface="Arial" pitchFamily="34" charset="-122"/>
                 <a:cs typeface="Arial" pitchFamily="34" charset="-120"/>
               </a:rPr>
-              <a:t>تكلفة البحث الميداني غير المبرر وصعوبة تحديد موقع التسرب بدقة</a:t>
+              <a:t>زيارات ميدانية لا ينتج عنها تسرب مؤكد، وتأخر الانكسار الحقيقي في طابور الأحداث</a:t>
             </a:r>
             <a:endParaRPr lang="ar-SA" sz="1100" dirty="0"/>
           </a:p>
@@ -5183,7 +5979,7 @@
                 <a:ea typeface="Arial" pitchFamily="34" charset="-122"/>
                 <a:cs typeface="Arial" pitchFamily="34" charset="-120"/>
               </a:rPr>
-              <a:t>خطر التلاعب بقراءات PLC/RTU، والانتقادات بسبب الهدر، وشكاوى المشتركين المستمرة</a:t>
+              <a:t>عطل حساس غير مكتشف يلوّث مؤشرات الفاقد؛ وقرارات تتفاوت بتفاوت خبرة المناوب</a:t>
             </a:r>
             <a:endParaRPr lang="ar-SA" sz="1100" dirty="0"/>
           </a:p>
@@ -5299,7 +6095,7 @@
                 <a:ea typeface="Arial" pitchFamily="34" charset="-122"/>
                 <a:cs typeface="Arial" pitchFamily="34" charset="-120"/>
               </a:rPr>
-              <a:t>خفض ملموس للفاقد، وتوجيه الفرق لموقع محدد، وتحويل الصيانة إلى مجدولة تنبؤية</a:t>
+              <a:t>كل حدث يصل بتصنيف ودرجة ثقة ودليل يسنده، فيُرتَّب الجهد الميداني حسب الأولوية</a:t>
             </a:r>
             <a:endParaRPr lang="ar-SA" sz="1100" dirty="0"/>
           </a:p>
@@ -5320,7 +6116,7 @@
                 <a:ea typeface="Arial" pitchFamily="34" charset="-122"/>
                 <a:cs typeface="Arial" pitchFamily="34" charset="-120"/>
               </a:rPr>
-              <a:t>امتثال كامل، تنبيه مبكر يرضي المشتركين، ومنصة محلية بمحتوى 100%؛ يقيس النجاح بنسبة NRW وزمن الاكتشاف</a:t>
+              <a:t>اكتشاف مبكر لانحراف الحساس، وتكامل قراءة فقط لا يلمس الأنظمة القائمة؛ يقيس النجاح بنسبة الزيارات المثمرة وزمن الوصول للقرار</a:t>
             </a:r>
             <a:endParaRPr lang="ar-SA" sz="1100" dirty="0"/>
           </a:p>
@@ -5359,7 +6155,7 @@
                 <a:ea typeface="Arial" pitchFamily="34" charset="-122"/>
                 <a:cs typeface="Arial" pitchFamily="34" charset="-120"/>
               </a:rPr>
-              <a:t>نبض NABD  |  حل كشف الفاقد والتسربات في شبكات المياه</a:t>
+              <a:t>نبض NABD  |  طبقة التحقق من أحداث التسرب في شبكات المياه</a:t>
             </a:r>
             <a:endParaRPr lang="ar-SA" sz="900" dirty="0"/>
           </a:p>
@@ -5398,7 +6194,7 @@
                 <a:ea typeface="Arial" pitchFamily="34" charset="-122"/>
                 <a:cs typeface="Arial" pitchFamily="34" charset="-120"/>
               </a:rPr>
-              <a:t>5</a:t>
+              <a:t>6</a:t>
             </a:r>
             <a:endParaRPr lang="ar-SA" sz="900" dirty="0"/>
           </a:p>
@@ -5412,9 +6208,9 @@
 </p:sld>
 </file>
 
-<file path=ppt/slides/slide6.xml><?xml version="1.0" encoding="utf-8"?>
+<file path=ppt/slides/slide7.xml><?xml version="1.0" encoding="utf-8"?>
 <p:sld xmlns:a="http://schemas.openxmlformats.org/drawingml/2006/main" xmlns:r="http://schemas.openxmlformats.org/officeDocument/2006/relationships" xmlns:p="http://schemas.openxmlformats.org/presentationml/2006/main">
-  <p:cSld name="Slide 6">
+  <p:cSld name="Slide 7">
     <p:bg>
       <p:bgPr>
         <a:solidFill>
@@ -5585,7 +6381,7 @@
                 <a:ea typeface="Arial" pitchFamily="34" charset="-122"/>
                 <a:cs typeface="Arial" pitchFamily="34" charset="-120"/>
               </a:rPr>
-              <a:t>جهات التشغيل والتنظيم (الشركة الوطنية للمياه، المدن الصناعية)</a:t>
+              <a:t>المشغّل نفسه (شركة المياه الوطنية) بصفته مالك البيانات وصاحب حالة الاستخدام</a:t>
             </a:r>
             <a:endParaRPr lang="ar-SA" sz="900" dirty="0"/>
           </a:p>
@@ -5606,7 +6402,7 @@
                 <a:ea typeface="Arial" pitchFamily="34" charset="-122"/>
                 <a:cs typeface="Arial" pitchFamily="34" charset="-120"/>
               </a:rPr>
-              <a:t>الهيئة الوطنية للأمن السيبراني (الامتثال لـ OTCC-1)</a:t>
+              <a:t>مزودو منصات الكشف والفاقد والتوأم الرقمي القائمة — تكامل لا استبدال</a:t>
             </a:r>
             <a:endParaRPr lang="ar-SA" sz="900" dirty="0"/>
           </a:p>
@@ -5627,7 +6423,7 @@
                 <a:ea typeface="Arial" pitchFamily="34" charset="-122"/>
                 <a:cs typeface="Arial" pitchFamily="34" charset="-120"/>
               </a:rPr>
-              <a:t>موردو الحساسات والعدادات الذكية (IoT)</a:t>
+              <a:t>موردو الحساسات وأنظمة القياس القائمة في الشبكة</a:t>
             </a:r>
             <a:endParaRPr lang="ar-SA" sz="900" dirty="0"/>
           </a:p>
@@ -5648,7 +6444,7 @@
                 <a:ea typeface="Arial" pitchFamily="34" charset="-122"/>
                 <a:cs typeface="Arial" pitchFamily="34" charset="-120"/>
               </a:rPr>
-              <a:t>منصة أيجس Aegis السعودية كشريك تقني أساسي</a:t>
+              <a:t>الجامعات ومراكز البحث لمعايرة النماذج الهيدروليكية</a:t>
             </a:r>
             <a:endParaRPr lang="ar-SA" sz="900" dirty="0"/>
           </a:p>
@@ -5669,7 +6465,7 @@
                 <a:ea typeface="Arial" pitchFamily="34" charset="-122"/>
                 <a:cs typeface="Arial" pitchFamily="34" charset="-120"/>
               </a:rPr>
-              <a:t>مراكز البحث والتطوير والجامعات المحلية</a:t>
+              <a:t>الجهات التنظيمية فيما يخص حوكمة مشاركة البيانات</a:t>
             </a:r>
             <a:endParaRPr lang="ar-SA" sz="900" dirty="0"/>
           </a:p>
@@ -5785,7 +6581,7 @@
                 <a:ea typeface="Arial" pitchFamily="34" charset="-122"/>
                 <a:cs typeface="Arial" pitchFamily="34" charset="-120"/>
               </a:rPr>
-              <a:t>بناء وصيانة التوأم الرقمي للشبكة</a:t>
+              <a:t>معايرة نماذج التحقق على البيانات التاريخية وأوامر العمل</a:t>
             </a:r>
             <a:endParaRPr lang="ar-SA" sz="900" dirty="0"/>
           </a:p>
@@ -5806,7 +6602,7 @@
                 <a:ea typeface="Arial" pitchFamily="34" charset="-122"/>
                 <a:cs typeface="Arial" pitchFamily="34" charset="-120"/>
               </a:rPr>
-              <a:t>تحليل لحظي للتدفق والضغط بالذكاء الاصطناعي لكشف الشذوذ</a:t>
+              <a:t>نمذجة التوقيع الهيدروليكي المحلي عبر أقرب الحساسات</a:t>
             </a:r>
             <a:endParaRPr lang="ar-SA" sz="900" dirty="0"/>
           </a:p>
@@ -5827,7 +6623,7 @@
                 <a:ea typeface="Arial" pitchFamily="34" charset="-122"/>
                 <a:cs typeface="Arial" pitchFamily="34" charset="-120"/>
               </a:rPr>
-              <a:t>تشغيل طبقة الثقة للتحقق من القراءات وأجهزة PLC/RTU</a:t>
+              <a:t>نمذجة صحة الحساس لكشف الانحراف والعطل</a:t>
             </a:r>
             <a:endParaRPr lang="ar-SA" sz="900" dirty="0"/>
           </a:p>
@@ -5848,7 +6644,7 @@
                 <a:ea typeface="Arial" pitchFamily="34" charset="-122"/>
                 <a:cs typeface="Arial" pitchFamily="34" charset="-120"/>
               </a:rPr>
-              <a:t>تكامل آمن بوضع قراءة فقط (OPC-UA / Historian)</a:t>
+              <a:t>تكامل قراءة فقط مع أنظمة القياس على IT</a:t>
             </a:r>
             <a:endParaRPr lang="ar-SA" sz="900" dirty="0"/>
           </a:p>
@@ -5964,7 +6760,7 @@
                 <a:ea typeface="Arial" pitchFamily="34" charset="-122"/>
                 <a:cs typeface="Arial" pitchFamily="34" charset="-120"/>
               </a:rPr>
-              <a:t>منصة نبض المبنية على منصة Aegis العاملة</a:t>
+              <a:t>بيانات الشبكة بموجب اتفاقية مشاركة بيانات</a:t>
             </a:r>
             <a:endParaRPr lang="ar-SA" sz="900" dirty="0"/>
           </a:p>
@@ -5985,7 +6781,7 @@
                 <a:ea typeface="Arial" pitchFamily="34" charset="-122"/>
                 <a:cs typeface="Arial" pitchFamily="34" charset="-120"/>
               </a:rPr>
-              <a:t>خوارزميات كشف التسرب والتنبؤ بأعطال الأصول</a:t>
+              <a:t>خوارزميات التصنيف ودرجة الثقة وكشف عطل الحساس</a:t>
             </a:r>
             <a:endParaRPr lang="ar-SA" sz="900" dirty="0"/>
           </a:p>
@@ -6006,7 +6802,7 @@
                 <a:ea typeface="Arial" pitchFamily="34" charset="-122"/>
                 <a:cs typeface="Arial" pitchFamily="34" charset="-120"/>
               </a:rPr>
-              <a:t>فريق OT وأمن سيبراني وعلوم بيانات</a:t>
+              <a:t>فريق هيدروليكا وعلوم بيانات وتكامل أنظمة</a:t>
             </a:r>
             <a:endParaRPr lang="ar-SA" sz="900" dirty="0"/>
           </a:p>
@@ -6027,7 +6823,7 @@
                 <a:ea typeface="Arial" pitchFamily="34" charset="-122"/>
                 <a:cs typeface="Arial" pitchFamily="34" charset="-120"/>
               </a:rPr>
-              <a:t>بيانات الشبكة التاريخية واللحظية</a:t>
+              <a:t>سجل أوامر العمل كمرجع لقياس دقة النموذج</a:t>
             </a:r>
             <a:endParaRPr lang="ar-SA" sz="900" dirty="0"/>
           </a:p>
@@ -6143,7 +6939,7 @@
                 <a:ea typeface="Arial" pitchFamily="34" charset="-122"/>
                 <a:cs typeface="Arial" pitchFamily="34" charset="-120"/>
               </a:rPr>
-              <a:t>كشف التسرب خلال دقائق بدل أيام، مع تحديد الموقع المرجّح</a:t>
+              <a:t>لا نكرر الكشف — نضيف الثقة: كل حدث مرشح يصل بتصنيف ودرجة ثقة والدليل الذي يسنده</a:t>
             </a:r>
             <a:endParaRPr lang="ar-SA" sz="900" dirty="0"/>
           </a:p>
@@ -6164,7 +6960,7 @@
                 <a:ea typeface="Arial" pitchFamily="34" charset="-122"/>
                 <a:cs typeface="Arial" pitchFamily="34" charset="-120"/>
               </a:rPr>
-              <a:t>طبقة ثقة تميز التسرب الفعلي عن عطل الحساس أو التلاعب السيبراني قبل أي إجراء</a:t>
+              <a:t>تمييز الانكسار المؤكد عن عطل الحساس عن التغير الطبيعي في الطلب قبل إصدار أمر العمل</a:t>
             </a:r>
             <a:endParaRPr lang="ar-SA" sz="900" dirty="0"/>
           </a:p>
@@ -6185,7 +6981,7 @@
                 <a:ea typeface="Arial" pitchFamily="34" charset="-122"/>
                 <a:cs typeface="Arial" pitchFamily="34" charset="-120"/>
               </a:rPr>
-              <a:t>حل محلي 100% (On-prem) دون تعديل على الأنظمة القائمة</a:t>
+              <a:t>ترتيب الجهد الميداني حسب الأولوية بدل التعامل مع الأحداث كقائمة متساوية</a:t>
             </a:r>
             <a:endParaRPr lang="ar-SA" sz="900" dirty="0"/>
           </a:p>
@@ -6206,7 +7002,7 @@
                 <a:ea typeface="Arial" pitchFamily="34" charset="-122"/>
                 <a:cs typeface="Arial" pitchFamily="34" charset="-120"/>
               </a:rPr>
-              <a:t>خفض NRW وتكاليف الصيانة وطاقة الضخ، وحماية البنية التحتية الحرجة</a:t>
+              <a:t>تكامل قراءة فقط فوق الأنظمة القائمة، بلا تحكم وبلا تعديل عليها</a:t>
             </a:r>
             <a:endParaRPr lang="ar-SA" sz="900" dirty="0"/>
           </a:p>
@@ -6227,7 +7023,7 @@
                 <a:ea typeface="Arial" pitchFamily="34" charset="-122"/>
                 <a:cs typeface="Arial" pitchFamily="34" charset="-120"/>
               </a:rPr>
-              <a:t>لماذا نتفوق: الجمع بين التوأم الرقمي وأمن OT في منصة واحدة محلية</a:t>
+              <a:t>لماذا نتفوق: منطق تحقق مُعايَر على بيانات الشبكة الفعلية لا على فرضيات عامة</a:t>
             </a:r>
             <a:endParaRPr lang="ar-SA" sz="900" dirty="0"/>
           </a:p>
@@ -6343,7 +7139,7 @@
                 <a:ea typeface="Arial" pitchFamily="34" charset="-122"/>
                 <a:cs typeface="Arial" pitchFamily="34" charset="-120"/>
               </a:rPr>
-              <a:t>حسابات مدارة ودعم فني متخصص</a:t>
+              <a:t>شراكة تشغيلية مع غرفة التحكم وفرق الصيانة</a:t>
             </a:r>
             <a:endParaRPr lang="ar-SA" sz="900" dirty="0"/>
           </a:p>
@@ -6364,7 +7160,7 @@
                 <a:ea typeface="Arial" pitchFamily="34" charset="-122"/>
                 <a:cs typeface="Arial" pitchFamily="34" charset="-120"/>
               </a:rPr>
-              <a:t>تقارير دورية: NRW، حالة الأصول، الحوادث</a:t>
+              <a:t>تقرير دوري: دقة التصنيف ونسبة الزيارات المثمرة</a:t>
             </a:r>
             <a:endParaRPr lang="ar-SA" sz="900" dirty="0"/>
           </a:p>
@@ -6385,7 +7181,7 @@
                 <a:ea typeface="Arial" pitchFamily="34" charset="-122"/>
                 <a:cs typeface="Arial" pitchFamily="34" charset="-120"/>
               </a:rPr>
-              <a:t>شراكة في التحول الرقمي وأمن OT</a:t>
+              <a:t>مراجعة مشتركة لكل حدث اختلف فيه النموذج مع الواقع</a:t>
             </a:r>
             <a:endParaRPr lang="ar-SA" sz="900" dirty="0"/>
           </a:p>
@@ -6406,7 +7202,7 @@
                 <a:ea typeface="Arial" pitchFamily="34" charset="-122"/>
                 <a:cs typeface="Arial" pitchFamily="34" charset="-120"/>
               </a:rPr>
-              <a:t>تنبيهات مباشرة للمشتركين (B2B2C)</a:t>
+              <a:t>حسابات مدارة ودعم فني متخصص</a:t>
             </a:r>
             <a:endParaRPr lang="ar-SA" sz="900" dirty="0"/>
           </a:p>
@@ -6543,7 +7339,7 @@
                 <a:ea typeface="Arial" pitchFamily="34" charset="-122"/>
                 <a:cs typeface="Arial" pitchFamily="34" charset="-120"/>
               </a:rPr>
-              <a:t>المناقصات المباشرة مع جهات التشغيل</a:t>
+              <a:t>إثبات مفهوم على بيانات تاريخية لمنطقة واحدة</a:t>
             </a:r>
             <a:endParaRPr lang="ar-SA" sz="900" dirty="0"/>
           </a:p>
@@ -6564,7 +7360,7 @@
                 <a:ea typeface="Arial" pitchFamily="34" charset="-122"/>
                 <a:cs typeface="Arial" pitchFamily="34" charset="-120"/>
               </a:rPr>
-              <a:t>نموذج تجريبي قابل للتوسع (الجبيل)</a:t>
+              <a:t>المناقصات المباشرة مع جهات التشغيل</a:t>
             </a:r>
             <a:endParaRPr lang="ar-SA" sz="900" dirty="0"/>
           </a:p>
@@ -6585,7 +7381,7 @@
                 <a:ea typeface="Arial" pitchFamily="34" charset="-122"/>
                 <a:cs typeface="Arial" pitchFamily="34" charset="-120"/>
               </a:rPr>
-              <a:t>شركاء التكامل والموردون</a:t>
+              <a:t>شركاء التكامل ومزودو المنصات القائمة</a:t>
             </a:r>
             <a:endParaRPr lang="ar-SA" sz="900" dirty="0"/>
           </a:p>
@@ -6701,7 +7497,7 @@
                 <a:ea typeface="Arial" pitchFamily="34" charset="-122"/>
                 <a:cs typeface="Arial" pitchFamily="34" charset="-120"/>
               </a:rPr>
-              <a:t>الشريحة الأولى: جهات تشغيل شبكات المياه في المدن الصناعية والكبرى (الجبيل أولاً)</a:t>
+              <a:t>الشريحة الأولى: مشغّلو شبكات توزيع يملكون بنية قياس وحساسات قائمة وسجل أوامر عمل</a:t>
             </a:r>
             <a:endParaRPr lang="ar-SA" sz="900" dirty="0"/>
           </a:p>
@@ -6722,7 +7518,7 @@
                 <a:ea typeface="Arial" pitchFamily="34" charset="-122"/>
                 <a:cs typeface="Arial" pitchFamily="34" charset="-120"/>
               </a:rPr>
-              <a:t>إدارات الأمن السيبراني والأنظمة التشغيلية في المرافق الحيوية</a:t>
+              <a:t>غرف التحكم وإدارات الفاقد التي تتخذ قرار الإرسال الميداني</a:t>
             </a:r>
             <a:endParaRPr lang="ar-SA" sz="900" dirty="0"/>
           </a:p>
@@ -6743,7 +7539,7 @@
                 <a:ea typeface="Arial" pitchFamily="34" charset="-122"/>
                 <a:cs typeface="Arial" pitchFamily="34" charset="-120"/>
               </a:rPr>
-              <a:t>لاحقاً: شركات التوزيع الإقليمية والمشغلون الخاصون</a:t>
+              <a:t>لاحقاً: المدن الصناعية وشركات التوزيع الإقليمية والمشغلون الخاصون</a:t>
             </a:r>
             <a:endParaRPr lang="ar-SA" sz="900" dirty="0"/>
           </a:p>
@@ -6859,7 +7655,7 @@
                 <a:ea typeface="Arial" pitchFamily="34" charset="-122"/>
                 <a:cs typeface="Arial" pitchFamily="34" charset="-120"/>
               </a:rPr>
-              <a:t>ثابتة: تطوير البرمجيات والخوارزميات، رواتب الفريق المتخصص، تراخيص وشهادات الامتثال</a:t>
+              <a:t>ثابتة: تطوير الخوارزميات ومعايرتها، رواتب الفريق المتخصص، بيئة التشغيل والامتثال</a:t>
             </a:r>
             <a:endParaRPr lang="ar-SA" sz="900" dirty="0"/>
           </a:p>
@@ -6880,7 +7676,7 @@
                 <a:ea typeface="Arial" pitchFamily="34" charset="-122"/>
                 <a:cs typeface="Arial" pitchFamily="34" charset="-120"/>
               </a:rPr>
-              <a:t>متغيرة: بنية On-prem لكل عميل، تكامل الحساسات، التدريب والدعم الميداني</a:t>
+              <a:t>متغيرة: التكامل مع أنظمة كل عميل، جهد المعايرة لكل منطقة، التدريب والدعم الميداني</a:t>
             </a:r>
             <a:endParaRPr lang="ar-SA" sz="900" dirty="0"/>
           </a:p>
@@ -6996,7 +7792,7 @@
                 <a:ea typeface="Arial" pitchFamily="34" charset="-122"/>
                 <a:cs typeface="Arial" pitchFamily="34" charset="-120"/>
               </a:rPr>
-              <a:t>ترخيص البرمجيات + عقد خدمة وصيانة سنوي (Managed Service)</a:t>
+              <a:t>ترخيص سنوي للمنصة + عقد خدمة مُدارة (Managed Service)</a:t>
             </a:r>
             <a:endParaRPr lang="ar-SA" sz="900" dirty="0"/>
           </a:p>
@@ -7017,7 +7813,7 @@
                 <a:ea typeface="Arial" pitchFamily="34" charset="-122"/>
                 <a:cs typeface="Arial" pitchFamily="34" charset="-120"/>
               </a:rPr>
-              <a:t>رسوم التكامل الأولي والتدريب، ونموذج مرتبط بالأداء: نسبة من قيمة التوفير في الفاقد أو طاقة الضخ</a:t>
+              <a:t>رسوم التكامل والمعايرة الأولية لكل منطقة، ونموذج مرتبط بالأداء: نسبة من وفر الزيارات غير المثمرة وتحسن زمن المعالجة</a:t>
             </a:r>
             <a:endParaRPr lang="ar-SA" sz="900" dirty="0"/>
           </a:p>
@@ -7056,7 +7852,7 @@
                 <a:ea typeface="Arial" pitchFamily="34" charset="-122"/>
                 <a:cs typeface="Arial" pitchFamily="34" charset="-120"/>
               </a:rPr>
-              <a:t>نبض NABD  |  حل كشف الفاقد والتسربات في شبكات المياه</a:t>
+              <a:t>نبض NABD  |  طبقة التحقق من أحداث التسرب في شبكات المياه</a:t>
             </a:r>
             <a:endParaRPr lang="ar-SA" sz="900" dirty="0"/>
           </a:p>
@@ -7095,7 +7891,7 @@
                 <a:ea typeface="Arial" pitchFamily="34" charset="-122"/>
                 <a:cs typeface="Arial" pitchFamily="34" charset="-120"/>
               </a:rPr>
-              <a:t>6</a:t>
+              <a:t>7</a:t>
             </a:r>
             <a:endParaRPr lang="ar-SA" sz="900" dirty="0"/>
           </a:p>
